--- a/deck/causeway-recursion.pptx
+++ b/deck/causeway-recursion.pptx
@@ -4173,7 +4173,7 @@
                 <a:cs typeface="Arial"/>
                 <a:sym typeface="Arial"/>
               </a:rPr>
-              <a:t>For SOC analysts: rebuilds the single incident behind a night of scattered alerts, names the earliest thing you could have contained, and refuses to act beyond its evidence.</a:t>
+              <a:t>For SOC analysts: one incident, with a named cause, from a night of alerts.</a:t>
             </a:r>
             <a:endParaRPr b="0" i="0" sz="1250" u="none" cap="none" strike="noStrike">
               <a:solidFill>
@@ -4374,7 +4374,7 @@
                 <a:cs typeface="Arial Black"/>
                 <a:sym typeface="Arial Black"/>
               </a:rPr>
-              <a:t>Cybersecurity — PS2, Causal SOC Alert Correlation &amp; Root-Cause Intelligence</a:t>
+              <a:t>Cybersecurity — PS2</a:t>
             </a:r>
             <a:endParaRPr b="0" i="0" sz="1500" u="none" cap="none" strike="noStrike">
               <a:solidFill>
@@ -4669,7 +4669,7 @@
                 <a:cs typeface="Courier New"/>
                 <a:sym typeface="Courier New"/>
               </a:rPr>
-              <a:t>[ Name ]</a:t>
+              <a:t>Shaan GS</a:t>
             </a:r>
             <a:endParaRPr b="0" i="0" sz="950" u="none" cap="none" strike="noStrike">
               <a:solidFill>
@@ -4732,7 +4732,7 @@
                 <a:cs typeface="Courier New"/>
                 <a:sym typeface="Courier New"/>
               </a:rPr>
-              <a:t>[ Name ]</a:t>
+              <a:t>Pradeesh Govindarajan</a:t>
             </a:r>
             <a:endParaRPr b="0" i="0" sz="950" u="none" cap="none" strike="noStrike">
               <a:solidFill>
@@ -4795,133 +4795,7 @@
                 <a:cs typeface="Courier New"/>
                 <a:sym typeface="Courier New"/>
               </a:rPr>
-              <a:t>[ Name ]</a:t>
-            </a:r>
-            <a:endParaRPr b="0" i="0" sz="950" u="none" cap="none" strike="noStrike">
-              <a:solidFill>
-                <a:schemeClr val="dk1"/>
-              </a:solidFill>
-              <a:latin typeface="Calibri"/>
-              <a:ea typeface="Calibri"/>
-              <a:cs typeface="Calibri"/>
-              <a:sym typeface="Calibri"/>
-            </a:endParaRPr>
-          </a:p>
-        </p:txBody>
-      </p:sp>
-      <p:sp>
-        <p:nvSpPr>
-          <p:cNvPr id="47" name="Google Shape;47;p1"/>
-          <p:cNvSpPr txBox="1"/>
-          <p:nvPr/>
-        </p:nvSpPr>
-        <p:spPr>
-          <a:xfrm>
-            <a:off x="8430768" y="4855464"/>
-            <a:ext cx="3017520" cy="256032"/>
-          </a:xfrm>
-          <a:prstGeom prst="rect">
-            <a:avLst/>
-          </a:prstGeom>
-          <a:noFill/>
-          <a:ln>
-            <a:noFill/>
-          </a:ln>
-        </p:spPr>
-        <p:txBody>
-          <a:bodyPr anchorCtr="0" anchor="ctr" bIns="0" lIns="0" spcFirstLastPara="1" rIns="0" wrap="square" tIns="0">
-            <a:noAutofit/>
-          </a:bodyPr>
-          <a:lstStyle/>
-          <a:p>
-            <a:pPr indent="0" lvl="0" marL="0" marR="0" rtl="0" algn="l">
-              <a:spcBef>
-                <a:spcPts val="0"/>
-              </a:spcBef>
-              <a:spcAft>
-                <a:spcPts val="0"/>
-              </a:spcAft>
-              <a:buClr>
-                <a:srgbClr val="FAF4E8"/>
-              </a:buClr>
-              <a:buSzPts val="950"/>
-              <a:buFont typeface="Courier New"/>
-              <a:buNone/>
-            </a:pPr>
-            <a:r>
-              <a:rPr b="0" i="0" lang="en-US" sz="950" u="none" cap="none" strike="noStrike">
-                <a:solidFill>
-                  <a:srgbClr val="FAF4E8"/>
-                </a:solidFill>
-                <a:latin typeface="Courier New"/>
-                <a:ea typeface="Courier New"/>
-                <a:cs typeface="Courier New"/>
-                <a:sym typeface="Courier New"/>
-              </a:rPr>
-              <a:t>[ Name ]</a:t>
-            </a:r>
-            <a:endParaRPr b="0" i="0" sz="950" u="none" cap="none" strike="noStrike">
-              <a:solidFill>
-                <a:schemeClr val="dk1"/>
-              </a:solidFill>
-              <a:latin typeface="Calibri"/>
-              <a:ea typeface="Calibri"/>
-              <a:cs typeface="Calibri"/>
-              <a:sym typeface="Calibri"/>
-            </a:endParaRPr>
-          </a:p>
-        </p:txBody>
-      </p:sp>
-      <p:sp>
-        <p:nvSpPr>
-          <p:cNvPr id="48" name="Google Shape;48;p1"/>
-          <p:cNvSpPr txBox="1"/>
-          <p:nvPr/>
-        </p:nvSpPr>
-        <p:spPr>
-          <a:xfrm>
-            <a:off x="8430768" y="5157216"/>
-            <a:ext cx="3017520" cy="256032"/>
-          </a:xfrm>
-          <a:prstGeom prst="rect">
-            <a:avLst/>
-          </a:prstGeom>
-          <a:noFill/>
-          <a:ln>
-            <a:noFill/>
-          </a:ln>
-        </p:spPr>
-        <p:txBody>
-          <a:bodyPr anchorCtr="0" anchor="ctr" bIns="0" lIns="0" spcFirstLastPara="1" rIns="0" wrap="square" tIns="0">
-            <a:noAutofit/>
-          </a:bodyPr>
-          <a:lstStyle/>
-          <a:p>
-            <a:pPr indent="0" lvl="0" marL="0" marR="0" rtl="0" algn="l">
-              <a:spcBef>
-                <a:spcPts val="0"/>
-              </a:spcBef>
-              <a:spcAft>
-                <a:spcPts val="0"/>
-              </a:spcAft>
-              <a:buClr>
-                <a:srgbClr val="FAF4E8"/>
-              </a:buClr>
-              <a:buSzPts val="950"/>
-              <a:buFont typeface="Courier New"/>
-              <a:buNone/>
-            </a:pPr>
-            <a:r>
-              <a:rPr b="0" i="0" lang="en-US" sz="950" u="none" cap="none" strike="noStrike">
-                <a:solidFill>
-                  <a:srgbClr val="FAF4E8"/>
-                </a:solidFill>
-                <a:latin typeface="Courier New"/>
-                <a:ea typeface="Courier New"/>
-                <a:cs typeface="Courier New"/>
-                <a:sym typeface="Courier New"/>
-              </a:rPr>
-              <a:t>[ Name ]</a:t>
+              <a:t>Shreyas Gopalika</a:t>
             </a:r>
             <a:endParaRPr b="0" i="0" sz="950" u="none" cap="none" strike="noStrike">
               <a:solidFill>
@@ -6174,7 +6048,7 @@
                 <a:cs typeface="Arial"/>
                 <a:sym typeface="Arial"/>
               </a:rPr>
-              <a:t>SOC analysts and incident responders, every shift. Alerts arrive from endpoint, identity, email, firewall and cloud at once — and a single attacker action can produce dozens of technically correct ones.</a:t>
+              <a:t>SOC analysts, every shift. One attacker action fires dozens of correct alerts across endpoint, identity, email, firewall and cloud.</a:t>
             </a:r>
             <a:endParaRPr sz="1150">
               <a:solidFill>
@@ -6469,7 +6343,7 @@
                 <a:cs typeface="Arial"/>
                 <a:sym typeface="Arial"/>
               </a:rPr>
-              <a:t>Analysts pivot between consoles by hand, matching timestamps, resolving identities and tracing processes to judge whether two alerts are one incident. Tooling dedups by merging alerts whose text looks alike.</a:t>
+              <a:t>Analysts pivot between consoles by hand, matching timestamps and identities. Tooling dedups by merging alerts whose text looks alike.</a:t>
             </a:r>
             <a:endParaRPr sz="1150">
               <a:solidFill>
@@ -6764,7 +6638,7 @@
                 <a:cs typeface="Arial"/>
                 <a:sym typeface="Arial"/>
               </a:rPr>
-              <a:t>Merging on text destroys evidence — two alerts that read identically can be two different attack stages. Broad automation isolates hosts on weak grounds. Both teach analysts to close queues rather than investigate.</a:t>
+              <a:t>Text-merging destroys evidence: two alerts that read alike can be two attack stages. Broad automation isolates hosts on weak grounds.</a:t>
             </a:r>
             <a:endParaRPr sz="1150">
               <a:solidFill>
@@ -7059,7 +6933,7 @@
                 <a:cs typeface="Arial"/>
                 <a:sym typeface="Arial"/>
               </a:rPr>
-              <a:t>We measured it. On a 938-alert corpus containing a 9-stage intrusion, text-similarity dedup buried the successful login that was the actual root cause, and recovered only 4 of the 9 stages.</a:t>
+              <a:t>We measured it. On a 938-alert corpus, text dedup buried the successful login that was the root cause and recovered 4 of 9 stages.</a:t>
             </a:r>
             <a:endParaRPr sz="1150">
               <a:solidFill>
@@ -7923,7 +7797,7 @@
                 <a:cs typeface="Arial"/>
                 <a:sym typeface="Arial"/>
               </a:rPr>
-              <a:t>A correlation layer that reconstructs the causal incident behind scattered alerts, ranks what to contain, and gates every response on the evidence actually supporting it.</a:t>
+              <a:t>Rebuilds the causal incident behind scattered alerts, ranks what to contain, and gates every response on the evidence for it.</a:t>
             </a:r>
             <a:endParaRPr sz="1150">
               <a:solidFill>
@@ -8314,7 +8188,7 @@
                 <a:cs typeface="Arial"/>
                 <a:sym typeface="Arial"/>
               </a:rPr>
-              <a:t>Point it at the alert stream, then open one case instead of hundreds: a causal graph with time across and one lane per machine, the ranked root cause, and a recommended action that shows its reasoning.</a:t>
+              <a:t>Open one case instead of hundreds: a causal graph, the ranked root cause, and a recommended action that shows its reasoning.</a:t>
             </a:r>
             <a:endParaRPr sz="1150">
               <a:solidFill>
@@ -8606,7 +8480,7 @@
                 <a:cs typeface="Arial"/>
                 <a:sym typeface="Arial"/>
               </a:rPr>
-              <a:t>938 alerts became 17 cases. All nine attack stages landed in one incident — recall 1.00 — and the top-ranked root cause was correct. Nothing is deleted: every suppressed alert is held with its grounds.</a:t>
+              <a:t>938 alerts became 17 cases. All nine stages in one incident, recall 1.00, root cause correct. Nothing is deleted.</a:t>
             </a:r>
             <a:endParaRPr sz="1150">
               <a:solidFill>
@@ -8898,7 +8772,7 @@
                 <a:cs typeface="Arial"/>
                 <a:sym typeface="Arial"/>
               </a:rPr>
-              <a:t>We rank entities, not alerts: nobody contains a row, they disable an account. And correlation confidence is kept apart from evidentiary trust, so a case can be near-certain and still barred from isolating a host.</a:t>
+              <a:t>We rank entities, not alerts — nobody contains a row. Confidence stays separate from what the evidence may authorise.</a:t>
             </a:r>
             <a:endParaRPr sz="1150">
               <a:solidFill>
@@ -10150,7 +10024,7 @@
                 <a:cs typeface="Arial Black"/>
                 <a:sym typeface="Arial Black"/>
               </a:rPr>
-              <a:t>EVIDENCE GATEWAY</a:t>
+              <a:t>EVIDENCE GATE</a:t>
             </a:r>
             <a:endParaRPr sz="900">
               <a:solidFill>
@@ -10356,7 +10230,7 @@
                 <a:cs typeface="Courier New"/>
                 <a:sym typeface="Courier New"/>
               </a:rPr>
-              <a:t>alerts from any product → canonical entities → causal DAG → evidence-gated response</a:t>
+              <a:t>any product → canonical entities → causal DAG → evidence-gated response</a:t>
             </a:r>
             <a:endParaRPr sz="950">
               <a:solidFill>
@@ -10651,7 +10525,7 @@
                 <a:cs typeface="Arial"/>
                 <a:sym typeface="Arial"/>
               </a:rPr>
-              <a:t>No model and no network call in the decision path. Correlation is deterministic rules over resolved entities, so the pipeline runs in ~24 ms and every edge and every refusal can be explained in one sentence.</a:t>
+              <a:t>No model, no network call in the decision path. Deterministic rules, ~42 ms per run, every refusal explainable in one sentence.</a:t>
             </a:r>
             <a:endParaRPr sz="1100">
               <a:solidFill>
@@ -10946,7 +10820,7 @@
                 <a:cs typeface="Arial"/>
                 <a:sym typeface="Arial"/>
               </a:rPr>
-              <a:t>Stopping the benign estate collapsing into one false incident. Solved by weighting each entity by rarity: the domain controller links nothing, a host seen in nine observations links strongly.</a:t>
+              <a:t>Stopping the benign estate collapsing into one incident. Fixed by weighting entities by rarity, so hub entities link nothing.</a:t>
             </a:r>
             <a:endParaRPr sz="1100">
               <a:solidFill>
@@ -11241,7 +11115,7 @@
                 <a:cs typeface="Arial"/>
                 <a:sym typeface="Arial"/>
               </a:rPr>
-              <a:t>27 tests and four configurations on identical input, including negative controls: with rarity weighting off, precision collapses to 0.13 while compression improves. An AST check proves no rule can read the labels.</a:t>
+              <a:t>27 tests, four configurations. With rarity weighting off precision collapses to 0.13 — the control that proves the design works.</a:t>
             </a:r>
             <a:endParaRPr sz="1100">
               <a:solidFill>
@@ -12134,7 +12008,7 @@
                 <a:cs typeface="Arial"/>
                 <a:sym typeface="Arial"/>
               </a:rPr>
-              <a:t>multi-sensor correlation, entity resolution, duplicate suppression with a reversible ledger, entity-level root cause, evidence-gated response, working console</a:t>
+              <a:t>correlation, entity resolution, reversible dedup, root cause, gated response, console</a:t>
             </a:r>
             <a:endParaRPr sz="1150">
               <a:solidFill>
@@ -12209,7 +12083,7 @@
                 <a:cs typeface="Arial"/>
                 <a:sym typeface="Arial"/>
               </a:rPr>
-              <a:t>we recommend actions, we never execute them; no live SIEM/EDR connectors, no ML model, no ticketing integration</a:t>
+              <a:t>we recommend actions, never execute them; no live connectors, no ML model</a:t>
             </a:r>
             <a:endParaRPr sz="1150">
               <a:solidFill>
@@ -12504,7 +12378,7 @@
                 <a:cs typeface="Arial"/>
                 <a:sym typeface="Arial"/>
               </a:rPr>
-              <a:t>Effectively zero. Pure Python, no model calls, no external API. 938 alerts process in ~24 ms on a laptop and a containment preview takes ~190 µs. Runs fully on-premise, which matters for security telemetry.</a:t>
+              <a:t>Effectively zero. Pure Python, no model calls, no external API. 938 alerts in ~42 ms, and it runs fully on-premise.</a:t>
             </a:r>
             <a:endParaRPr sz="1150">
               <a:solidFill>
@@ -12799,7 +12673,7 @@
                 <a:cs typeface="Arial"/>
                 <a:sym typeface="Arial"/>
               </a:rPr>
-              <a:t>Precision on real telemetry: ours is 0.755 and thresholds are tuned on a corpus we wrote. Fallback is the public AIT Alert Data Set — three sensors, a labelled 9-stage attack — to re-tune against data we did not author.</a:t>
+              <a:t>Precision on real telemetry. We tested on the public AIT corpus: dedup transferred, correlation did not. Reported, not hidden.</a:t>
             </a:r>
             <a:endParaRPr sz="1150">
               <a:solidFill>
@@ -13094,7 +12968,7 @@
                 <a:cs typeface="Arial"/>
                 <a:sym typeface="Arial"/>
               </a:rPr>
-              <a:t>Finish the public-dataset adapter, add live connectors, and learn entity rarity from an organisation's own baseline rather than from a single corpus.</a:t>
+              <a:t>Learn entity rarity from an environment's own baseline, then add live connectors.</a:t>
             </a:r>
             <a:endParaRPr sz="1150">
               <a:solidFill>
@@ -13809,7 +13683,7 @@
                 <a:cs typeface="Courier New"/>
                 <a:sym typeface="Courier New"/>
               </a:rPr>
-              <a:t>fewer items to open — 938 alerts became 17 cases, with every attack stage preserved</a:t>
+              <a:t>fewer queue items — 938 alerts became 17 cases</a:t>
             </a:r>
             <a:endParaRPr sz="1150">
               <a:solidFill>
@@ -13989,7 +13863,7 @@
                 <a:cs typeface="Arial"/>
                 <a:sym typeface="Arial"/>
               </a:rPr>
-              <a:t>938-alert corpus with a labelled 9-stage intrusion. Cases = incidents plus any lone high-severity observation: 17. Recall 1.00 and zero evidence-erasing suppressions confirm the reduction did not come from discarding anything.</a:t>
+              <a:t>938-alert corpus, labelled 9-stage intrusion. Cases = 17. Recall 1.00 and zero evidence-erasing suppressions.</a:t>
             </a:r>
             <a:endParaRPr sz="1200">
               <a:solidFill>
@@ -14281,7 +14155,7 @@
                 <a:cs typeface="Arial"/>
                 <a:sym typeface="Arial"/>
               </a:rPr>
-              <a:t>Analysts open 17 cases instead of 938 rows, with the root cause named rather than hunted.</a:t>
+              <a:t>Analysts open 17 cases, not 938 rows, with the root cause named.</a:t>
             </a:r>
             <a:endParaRPr sz="1000">
               <a:solidFill>
@@ -14573,7 +14447,7 @@
                 <a:cs typeface="Arial"/>
                 <a:sym typeface="Arial"/>
               </a:rPr>
-              <a:t>MSSPs triaging many tenants, cloud-security teams, and regulated environments that must justify any automated action.</a:t>
+              <a:t>MSSPs, cloud-security teams, and regulated environments needing an audit trail.</a:t>
             </a:r>
             <a:endParaRPr sz="1000">
               <a:solidFill>
@@ -14865,7 +14739,7 @@
                 <a:cs typeface="Arial"/>
                 <a:sym typeface="Arial"/>
               </a:rPr>
-              <a:t>Over-trust. A confident-looking graph could persuade an analyst to skip verification, and a wrong merge hides a real alert.</a:t>
+              <a:t>Over-trust: a confident graph could persuade an analyst to skip verification.</a:t>
             </a:r>
             <a:endParaRPr sz="1000">
               <a:solidFill>
@@ -15157,7 +15031,7 @@
                 <a:cs typeface="Arial"/>
                 <a:sym typeface="Arial"/>
               </a:rPr>
-              <a:t>Nothing is deleted: every suppression is reversible and states its grounds. Destructive actions stay behind a human.</a:t>
+              <a:t>Nothing is deleted; every suppression is reversible. Destructive actions need a human.</a:t>
             </a:r>
             <a:endParaRPr sz="1000">
               <a:solidFill>
@@ -16408,7 +16282,7 @@
                           <a:cs typeface="Arial"/>
                           <a:sym typeface="Arial"/>
                         </a:rPr>
-                        <a:t>Landauer, Skopik, Wurzenberger — “Introducing a New Alert Data Set for Multi-Step Attack Analysis”, CSET ’24</a:t>
+                        <a:t>Landauer et al., “A New Alert Data Set for Multi-Step Attack Analysis”, CSET ’24</a:t>
                       </a:r>
                       <a:endParaRPr sz="1050" u="none" cap="none" strike="noStrike">
                         <a:latin typeface="Arial"/>
@@ -16489,7 +16363,7 @@
                           <a:cs typeface="Arial"/>
                           <a:sym typeface="Arial"/>
                         </a:rPr>
-                        <a:t>Alert-level (not log-level) corpus design and the multi-step attack framing</a:t>
+                        <a:t>Alert-level corpus design; multi-step framing</a:t>
                       </a:r>
                       <a:endParaRPr sz="1050" u="none" cap="none" strike="noStrike">
                         <a:latin typeface="Arial"/>
@@ -16570,7 +16444,7 @@
                           <a:cs typeface="Arial"/>
                           <a:sym typeface="Arial"/>
                         </a:rPr>
-                        <a:t>borrowed — cited, no code used</a:t>
+                        <a:t>borrowed — cited</a:t>
                       </a:r>
                       <a:endParaRPr sz="1050" u="none" cap="none" strike="noStrike">
                         <a:latin typeface="Arial"/>
@@ -16815,7 +16689,7 @@
                           <a:cs typeface="Arial"/>
                           <a:sym typeface="Arial"/>
                         </a:rPr>
-                        <a:t>Ventriloquist — provenance gateway (our own EDGE NOVA’26 project)</a:t>
+                        <a:t>Ventriloquist — our own EDGE NOVA’26 provenance gateway</a:t>
                       </a:r>
                       <a:endParaRPr sz="1050" u="none" cap="none" strike="noStrike">
                         <a:latin typeface="Arial"/>
@@ -16896,7 +16770,7 @@
                           <a:cs typeface="Arial"/>
                           <a:sym typeface="Arial"/>
                         </a:rPr>
-                        <a:t>Lineage closure, blast-radius, hash-chained audit log, policy engine</a:t>
+                        <a:t>Lineage closure, blast radius, audit chain, policy engine</a:t>
                       </a:r>
                       <a:endParaRPr sz="1050" u="none" cap="none" strike="noStrike">
                         <a:latin typeface="Arial"/>
@@ -17058,7 +16932,7 @@
                           <a:cs typeface="Arial"/>
                           <a:sym typeface="Arial"/>
                         </a:rPr>
-                        <a:t>own work, vendored</a:t>
+                        <a:t>own work</a:t>
                       </a:r>
                       <a:endParaRPr sz="1050" u="none" cap="none" strike="noStrike">
                         <a:latin typeface="Arial"/>
@@ -17303,7 +17177,7 @@
                           <a:cs typeface="Arial"/>
                           <a:sym typeface="Arial"/>
                         </a:rPr>
-                        <a:t>HTTP surface for the console and YAML policy loading</a:t>
+                        <a:t>HTTP surface and YAML policy loading</a:t>
                       </a:r>
                       <a:endParaRPr sz="1050" u="none" cap="none" strike="noStrike">
                         <a:latin typeface="Arial"/>
@@ -17629,7 +17503,7 @@
                           <a:cs typeface="Arial"/>
                           <a:sym typeface="Arial"/>
                         </a:rPr>
-                        <a:t>AIT Alert Data Set — Zenodo, doi 10.5281/zenodo.8263181</a:t>
+                        <a:t>AIT Alert Data Set — doi 10.5281/zenodo.8263181</a:t>
                       </a:r>
                       <a:endParaRPr sz="1050" u="none" cap="none" strike="noStrike">
                         <a:latin typeface="Arial"/>
@@ -17710,7 +17584,7 @@
                           <a:cs typeface="Arial"/>
                           <a:sym typeface="Arial"/>
                         </a:rPr>
-                        <a:t>Public multi-sensor labelled alerts; adapter in progress</a:t>
+                        <a:t>45,544 real labelled alerts, 3 detectors</a:t>
                       </a:r>
                       <a:endParaRPr sz="1050" u="none" cap="none" strike="noStrike">
                         <a:latin typeface="Arial"/>
@@ -18036,7 +17910,7 @@
                           <a:cs typeface="Arial"/>
                           <a:sym typeface="Arial"/>
                         </a:rPr>
-                        <a:t>None — no ML model or pretrained weights are used</a:t>
+                        <a:t>None — no ML model or pretrained weights</a:t>
                       </a:r>
                       <a:endParaRPr sz="1050" u="none" cap="none" strike="noStrike">
                         <a:latin typeface="Arial"/>
@@ -18117,7 +17991,7 @@
                           <a:cs typeface="Arial"/>
                           <a:sym typeface="Arial"/>
                         </a:rPr>
-                        <a:t>Correlation is deterministic; there is no inference step to attribute</a:t>
+                        <a:t>Correlation is deterministic; no inference step</a:t>
                       </a:r>
                       <a:endParaRPr sz="1050" u="none" cap="none" strike="noStrike">
                         <a:latin typeface="Arial"/>
@@ -18965,7 +18839,7 @@
                 <a:cs typeface="Courier New"/>
                 <a:sym typeface="Courier New"/>
               </a:rPr>
-              <a:t>THE CONSOLE — 938 alerts, one reconstructed incident, the ranked root cause, and the response ladder showing what the evidence does and does not authorise</a:t>
+              <a:t>One reconstructed incident: 938 alerts in, ranked root cause, gated response.</a:t>
             </a:r>
             <a:endParaRPr sz="1000">
               <a:solidFill>
@@ -19094,7 +18968,7 @@
         </p:blipFill>
         <p:spPr>
           <a:xfrm>
-            <a:off x="1389888" y="2615184"/>
+            <a:off x="1389888" y="2651760"/>
             <a:ext cx="9418320" cy="3346704"/>
           </a:xfrm>
           <a:prstGeom prst="rect">
@@ -19826,7 +19700,7 @@
         <p:spPr>
           <a:xfrm>
             <a:off x="630936" y="2679192"/>
-            <a:ext cx="11091672" cy="3145536"/>
+            <a:ext cx="11091672" cy="2194579"/>
           </a:xfrm>
           <a:prstGeom prst="rect">
             <a:avLst/>
@@ -19868,7 +19742,7 @@
         </p:nvGraphicFramePr>
         <p:xfrm>
           <a:off x="548640" y="2596896"/>
-          <a:ext cx="3000000" cy="3000000"/>
+          <a:ext cx="3000000" cy="2048275"/>
         </p:xfrm>
         <a:graphic>
           <a:graphicData uri="http://schemas.openxmlformats.org/drawingml/2006/table">
@@ -20157,7 +20031,7 @@
                           <a:cs typeface="Arial Black"/>
                           <a:sym typeface="Arial Black"/>
                         </a:rPr>
-                        <a:t>[ Name ]</a:t>
+                        <a:t>Shaan GS</a:t>
                       </a:r>
                       <a:endParaRPr sz="1100" u="none" cap="none" strike="noStrike">
                         <a:latin typeface="Arial Black"/>
@@ -20238,7 +20112,7 @@
                           <a:cs typeface="Arial"/>
                           <a:sym typeface="Arial"/>
                         </a:rPr>
-                        <a:t>[ phone number ]</a:t>
+                        <a:t>—</a:t>
                       </a:r>
                       <a:endParaRPr sz="1050" u="none" cap="none" strike="noStrike">
                         <a:latin typeface="Arial"/>
@@ -20319,7 +20193,7 @@
                           <a:cs typeface="Arial"/>
                           <a:sym typeface="Arial"/>
                         </a:rPr>
-                        <a:t>[ email address ]</a:t>
+                        <a:t>shaangurushankar@gmail.com</a:t>
                       </a:r>
                       <a:endParaRPr sz="1050" u="none" cap="none" strike="noStrike">
                         <a:latin typeface="Arial"/>
@@ -20402,7 +20276,7 @@
                           <a:cs typeface="Arial Black"/>
                           <a:sym typeface="Arial Black"/>
                         </a:rPr>
-                        <a:t>[ Name ]</a:t>
+                        <a:t>Pradeesh Govindarajan</a:t>
                       </a:r>
                       <a:endParaRPr sz="1100" u="none" cap="none" strike="noStrike">
                         <a:latin typeface="Arial Black"/>
@@ -20483,7 +20357,7 @@
                           <a:cs typeface="Arial"/>
                           <a:sym typeface="Arial"/>
                         </a:rPr>
-                        <a:t>[ phone number ]</a:t>
+                        <a:t>—</a:t>
                       </a:r>
                       <a:endParaRPr sz="1050" u="none" cap="none" strike="noStrike">
                         <a:latin typeface="Arial"/>
@@ -20564,7 +20438,7 @@
                           <a:cs typeface="Arial"/>
                           <a:sym typeface="Arial"/>
                         </a:rPr>
-                        <a:t>[ email address ]</a:t>
+                        <a:t>pradeeshgovi@gmail.com</a:t>
                       </a:r>
                       <a:endParaRPr sz="1050" u="none" cap="none" strike="noStrike">
                         <a:latin typeface="Arial"/>
@@ -20647,7 +20521,7 @@
                           <a:cs typeface="Arial Black"/>
                           <a:sym typeface="Arial Black"/>
                         </a:rPr>
-                        <a:t>[ Name ]</a:t>
+                        <a:t>Shreyas Gopalika</a:t>
                       </a:r>
                       <a:endParaRPr sz="1100" u="none" cap="none" strike="noStrike">
                         <a:latin typeface="Arial Black"/>
@@ -20728,7 +20602,7 @@
                           <a:cs typeface="Arial"/>
                           <a:sym typeface="Arial"/>
                         </a:rPr>
-                        <a:t>[ phone number ]</a:t>
+                        <a:t>—</a:t>
                       </a:r>
                       <a:endParaRPr sz="1050" u="none" cap="none" strike="noStrike">
                         <a:latin typeface="Arial"/>
@@ -20809,497 +20683,7 @@
                           <a:cs typeface="Arial"/>
                           <a:sym typeface="Arial"/>
                         </a:rPr>
-                        <a:t>[ email address ]</a:t>
-                      </a:r>
-                      <a:endParaRPr sz="1050" u="none" cap="none" strike="noStrike">
-                        <a:latin typeface="Arial"/>
-                        <a:ea typeface="Arial"/>
-                        <a:cs typeface="Arial"/>
-                        <a:sym typeface="Arial"/>
-                      </a:endParaRPr>
-                    </a:p>
-                  </a:txBody>
-                  <a:tcPr marT="36575" marB="36575" marR="73150" marL="91450" anchor="ctr">
-                    <a:lnL cap="flat" cmpd="sng" w="19050">
-                      <a:solidFill>
-                        <a:srgbClr val="111111"/>
-                      </a:solidFill>
-                      <a:prstDash val="solid"/>
-                      <a:round/>
-                      <a:headEnd len="sm" w="sm" type="none"/>
-                      <a:tailEnd len="sm" w="sm" type="none"/>
-                    </a:lnL>
-                    <a:lnR cap="flat" cmpd="sng" w="19050">
-                      <a:solidFill>
-                        <a:srgbClr val="111111"/>
-                      </a:solidFill>
-                      <a:prstDash val="solid"/>
-                      <a:round/>
-                      <a:headEnd len="sm" w="sm" type="none"/>
-                      <a:tailEnd len="sm" w="sm" type="none"/>
-                    </a:lnR>
-                    <a:lnT cap="flat" cmpd="sng" w="19050">
-                      <a:solidFill>
-                        <a:srgbClr val="111111"/>
-                      </a:solidFill>
-                      <a:prstDash val="solid"/>
-                      <a:round/>
-                      <a:headEnd len="sm" w="sm" type="none"/>
-                      <a:tailEnd len="sm" w="sm" type="none"/>
-                    </a:lnT>
-                    <a:lnB cap="flat" cmpd="sng" w="19050">
-                      <a:solidFill>
-                        <a:srgbClr val="111111"/>
-                      </a:solidFill>
-                      <a:prstDash val="solid"/>
-                      <a:round/>
-                      <a:headEnd len="sm" w="sm" type="none"/>
-                      <a:tailEnd len="sm" w="sm" type="none"/>
-                    </a:lnB>
-                    <a:solidFill>
-                      <a:srgbClr val="FFFFFF"/>
-                    </a:solidFill>
-                  </a:tcPr>
-                </a:tc>
-              </a:tr>
-              <a:tr h="548650">
-                <a:tc>
-                  <a:txBody>
-                    <a:bodyPr/>
-                    <a:lstStyle/>
-                    <a:p>
-                      <a:pPr indent="0" lvl="0" marL="0" marR="0" rtl="0" algn="l">
-                        <a:spcBef>
-                          <a:spcPts val="0"/>
-                        </a:spcBef>
-                        <a:spcAft>
-                          <a:spcPts val="0"/>
-                        </a:spcAft>
-                        <a:buClr>
-                          <a:srgbClr val="111111"/>
-                        </a:buClr>
-                        <a:buSzPts val="1100"/>
-                        <a:buFont typeface="Arial Black"/>
-                        <a:buNone/>
-                      </a:pPr>
-                      <a:r>
-                        <a:rPr lang="en-US" sz="1100" u="none" cap="none" strike="noStrike">
-                          <a:solidFill>
-                            <a:srgbClr val="111111"/>
-                          </a:solidFill>
-                          <a:latin typeface="Arial Black"/>
-                          <a:ea typeface="Arial Black"/>
-                          <a:cs typeface="Arial Black"/>
-                          <a:sym typeface="Arial Black"/>
-                        </a:rPr>
-                        <a:t>[ Name ]</a:t>
-                      </a:r>
-                      <a:endParaRPr sz="1100" u="none" cap="none" strike="noStrike">
-                        <a:latin typeface="Arial Black"/>
-                        <a:ea typeface="Arial Black"/>
-                        <a:cs typeface="Arial Black"/>
-                        <a:sym typeface="Arial Black"/>
-                      </a:endParaRPr>
-                    </a:p>
-                  </a:txBody>
-                  <a:tcPr marT="36575" marB="36575" marR="73150" marL="91450" anchor="ctr">
-                    <a:lnL cap="flat" cmpd="sng" w="19050">
-                      <a:solidFill>
-                        <a:srgbClr val="111111"/>
-                      </a:solidFill>
-                      <a:prstDash val="solid"/>
-                      <a:round/>
-                      <a:headEnd len="sm" w="sm" type="none"/>
-                      <a:tailEnd len="sm" w="sm" type="none"/>
-                    </a:lnL>
-                    <a:lnR cap="flat" cmpd="sng" w="19050">
-                      <a:solidFill>
-                        <a:srgbClr val="111111"/>
-                      </a:solidFill>
-                      <a:prstDash val="solid"/>
-                      <a:round/>
-                      <a:headEnd len="sm" w="sm" type="none"/>
-                      <a:tailEnd len="sm" w="sm" type="none"/>
-                    </a:lnR>
-                    <a:lnT cap="flat" cmpd="sng" w="19050">
-                      <a:solidFill>
-                        <a:srgbClr val="111111"/>
-                      </a:solidFill>
-                      <a:prstDash val="solid"/>
-                      <a:round/>
-                      <a:headEnd len="sm" w="sm" type="none"/>
-                      <a:tailEnd len="sm" w="sm" type="none"/>
-                    </a:lnT>
-                    <a:lnB cap="flat" cmpd="sng" w="19050">
-                      <a:solidFill>
-                        <a:srgbClr val="111111"/>
-                      </a:solidFill>
-                      <a:prstDash val="solid"/>
-                      <a:round/>
-                      <a:headEnd len="sm" w="sm" type="none"/>
-                      <a:tailEnd len="sm" w="sm" type="none"/>
-                    </a:lnB>
-                    <a:solidFill>
-                      <a:srgbClr val="FFFFFF"/>
-                    </a:solidFill>
-                  </a:tcPr>
-                </a:tc>
-                <a:tc>
-                  <a:txBody>
-                    <a:bodyPr/>
-                    <a:lstStyle/>
-                    <a:p>
-                      <a:pPr indent="0" lvl="0" marL="0" marR="0" rtl="0" algn="l">
-                        <a:spcBef>
-                          <a:spcPts val="0"/>
-                        </a:spcBef>
-                        <a:spcAft>
-                          <a:spcPts val="0"/>
-                        </a:spcAft>
-                        <a:buClr>
-                          <a:srgbClr val="6E6A5E"/>
-                        </a:buClr>
-                        <a:buSzPts val="1050"/>
-                        <a:buFont typeface="Arial"/>
-                        <a:buNone/>
-                      </a:pPr>
-                      <a:r>
-                        <a:rPr i="1" lang="en-US" sz="1050" u="none" cap="none" strike="noStrike">
-                          <a:solidFill>
-                            <a:srgbClr val="6E6A5E"/>
-                          </a:solidFill>
-                          <a:latin typeface="Arial"/>
-                          <a:ea typeface="Arial"/>
-                          <a:cs typeface="Arial"/>
-                          <a:sym typeface="Arial"/>
-                        </a:rPr>
-                        <a:t>[ phone number ]</a:t>
-                      </a:r>
-                      <a:endParaRPr sz="1050" u="none" cap="none" strike="noStrike">
-                        <a:latin typeface="Arial"/>
-                        <a:ea typeface="Arial"/>
-                        <a:cs typeface="Arial"/>
-                        <a:sym typeface="Arial"/>
-                      </a:endParaRPr>
-                    </a:p>
-                  </a:txBody>
-                  <a:tcPr marT="36575" marB="36575" marR="73150" marL="91450" anchor="ctr">
-                    <a:lnL cap="flat" cmpd="sng" w="19050">
-                      <a:solidFill>
-                        <a:srgbClr val="111111"/>
-                      </a:solidFill>
-                      <a:prstDash val="solid"/>
-                      <a:round/>
-                      <a:headEnd len="sm" w="sm" type="none"/>
-                      <a:tailEnd len="sm" w="sm" type="none"/>
-                    </a:lnL>
-                    <a:lnR cap="flat" cmpd="sng" w="19050">
-                      <a:solidFill>
-                        <a:srgbClr val="111111"/>
-                      </a:solidFill>
-                      <a:prstDash val="solid"/>
-                      <a:round/>
-                      <a:headEnd len="sm" w="sm" type="none"/>
-                      <a:tailEnd len="sm" w="sm" type="none"/>
-                    </a:lnR>
-                    <a:lnT cap="flat" cmpd="sng" w="19050">
-                      <a:solidFill>
-                        <a:srgbClr val="111111"/>
-                      </a:solidFill>
-                      <a:prstDash val="solid"/>
-                      <a:round/>
-                      <a:headEnd len="sm" w="sm" type="none"/>
-                      <a:tailEnd len="sm" w="sm" type="none"/>
-                    </a:lnT>
-                    <a:lnB cap="flat" cmpd="sng" w="19050">
-                      <a:solidFill>
-                        <a:srgbClr val="111111"/>
-                      </a:solidFill>
-                      <a:prstDash val="solid"/>
-                      <a:round/>
-                      <a:headEnd len="sm" w="sm" type="none"/>
-                      <a:tailEnd len="sm" w="sm" type="none"/>
-                    </a:lnB>
-                    <a:solidFill>
-                      <a:srgbClr val="FFFFFF"/>
-                    </a:solidFill>
-                  </a:tcPr>
-                </a:tc>
-                <a:tc>
-                  <a:txBody>
-                    <a:bodyPr/>
-                    <a:lstStyle/>
-                    <a:p>
-                      <a:pPr indent="0" lvl="0" marL="0" marR="0" rtl="0" algn="l">
-                        <a:spcBef>
-                          <a:spcPts val="0"/>
-                        </a:spcBef>
-                        <a:spcAft>
-                          <a:spcPts val="0"/>
-                        </a:spcAft>
-                        <a:buClr>
-                          <a:srgbClr val="6E6A5E"/>
-                        </a:buClr>
-                        <a:buSzPts val="1050"/>
-                        <a:buFont typeface="Arial"/>
-                        <a:buNone/>
-                      </a:pPr>
-                      <a:r>
-                        <a:rPr i="1" lang="en-US" sz="1050" u="none" cap="none" strike="noStrike">
-                          <a:solidFill>
-                            <a:srgbClr val="6E6A5E"/>
-                          </a:solidFill>
-                          <a:latin typeface="Arial"/>
-                          <a:ea typeface="Arial"/>
-                          <a:cs typeface="Arial"/>
-                          <a:sym typeface="Arial"/>
-                        </a:rPr>
-                        <a:t>[ email address ]</a:t>
-                      </a:r>
-                      <a:endParaRPr sz="1050" u="none" cap="none" strike="noStrike">
-                        <a:latin typeface="Arial"/>
-                        <a:ea typeface="Arial"/>
-                        <a:cs typeface="Arial"/>
-                        <a:sym typeface="Arial"/>
-                      </a:endParaRPr>
-                    </a:p>
-                  </a:txBody>
-                  <a:tcPr marT="36575" marB="36575" marR="73150" marL="91450" anchor="ctr">
-                    <a:lnL cap="flat" cmpd="sng" w="19050">
-                      <a:solidFill>
-                        <a:srgbClr val="111111"/>
-                      </a:solidFill>
-                      <a:prstDash val="solid"/>
-                      <a:round/>
-                      <a:headEnd len="sm" w="sm" type="none"/>
-                      <a:tailEnd len="sm" w="sm" type="none"/>
-                    </a:lnL>
-                    <a:lnR cap="flat" cmpd="sng" w="19050">
-                      <a:solidFill>
-                        <a:srgbClr val="111111"/>
-                      </a:solidFill>
-                      <a:prstDash val="solid"/>
-                      <a:round/>
-                      <a:headEnd len="sm" w="sm" type="none"/>
-                      <a:tailEnd len="sm" w="sm" type="none"/>
-                    </a:lnR>
-                    <a:lnT cap="flat" cmpd="sng" w="19050">
-                      <a:solidFill>
-                        <a:srgbClr val="111111"/>
-                      </a:solidFill>
-                      <a:prstDash val="solid"/>
-                      <a:round/>
-                      <a:headEnd len="sm" w="sm" type="none"/>
-                      <a:tailEnd len="sm" w="sm" type="none"/>
-                    </a:lnT>
-                    <a:lnB cap="flat" cmpd="sng" w="19050">
-                      <a:solidFill>
-                        <a:srgbClr val="111111"/>
-                      </a:solidFill>
-                      <a:prstDash val="solid"/>
-                      <a:round/>
-                      <a:headEnd len="sm" w="sm" type="none"/>
-                      <a:tailEnd len="sm" w="sm" type="none"/>
-                    </a:lnB>
-                    <a:solidFill>
-                      <a:srgbClr val="FFFFFF"/>
-                    </a:solidFill>
-                  </a:tcPr>
-                </a:tc>
-              </a:tr>
-              <a:tr h="548650">
-                <a:tc>
-                  <a:txBody>
-                    <a:bodyPr/>
-                    <a:lstStyle/>
-                    <a:p>
-                      <a:pPr indent="0" lvl="0" marL="0" marR="0" rtl="0" algn="l">
-                        <a:spcBef>
-                          <a:spcPts val="0"/>
-                        </a:spcBef>
-                        <a:spcAft>
-                          <a:spcPts val="0"/>
-                        </a:spcAft>
-                        <a:buClr>
-                          <a:srgbClr val="111111"/>
-                        </a:buClr>
-                        <a:buSzPts val="1100"/>
-                        <a:buFont typeface="Arial Black"/>
-                        <a:buNone/>
-                      </a:pPr>
-                      <a:r>
-                        <a:rPr lang="en-US" sz="1100" u="none" cap="none" strike="noStrike">
-                          <a:solidFill>
-                            <a:srgbClr val="111111"/>
-                          </a:solidFill>
-                          <a:latin typeface="Arial Black"/>
-                          <a:ea typeface="Arial Black"/>
-                          <a:cs typeface="Arial Black"/>
-                          <a:sym typeface="Arial Black"/>
-                        </a:rPr>
-                        <a:t>[ Name ]</a:t>
-                      </a:r>
-                      <a:endParaRPr sz="1100" u="none" cap="none" strike="noStrike">
-                        <a:latin typeface="Arial Black"/>
-                        <a:ea typeface="Arial Black"/>
-                        <a:cs typeface="Arial Black"/>
-                        <a:sym typeface="Arial Black"/>
-                      </a:endParaRPr>
-                    </a:p>
-                  </a:txBody>
-                  <a:tcPr marT="36575" marB="36575" marR="73150" marL="91450" anchor="ctr">
-                    <a:lnL cap="flat" cmpd="sng" w="19050">
-                      <a:solidFill>
-                        <a:srgbClr val="111111"/>
-                      </a:solidFill>
-                      <a:prstDash val="solid"/>
-                      <a:round/>
-                      <a:headEnd len="sm" w="sm" type="none"/>
-                      <a:tailEnd len="sm" w="sm" type="none"/>
-                    </a:lnL>
-                    <a:lnR cap="flat" cmpd="sng" w="19050">
-                      <a:solidFill>
-                        <a:srgbClr val="111111"/>
-                      </a:solidFill>
-                      <a:prstDash val="solid"/>
-                      <a:round/>
-                      <a:headEnd len="sm" w="sm" type="none"/>
-                      <a:tailEnd len="sm" w="sm" type="none"/>
-                    </a:lnR>
-                    <a:lnT cap="flat" cmpd="sng" w="19050">
-                      <a:solidFill>
-                        <a:srgbClr val="111111"/>
-                      </a:solidFill>
-                      <a:prstDash val="solid"/>
-                      <a:round/>
-                      <a:headEnd len="sm" w="sm" type="none"/>
-                      <a:tailEnd len="sm" w="sm" type="none"/>
-                    </a:lnT>
-                    <a:lnB cap="flat" cmpd="sng" w="19050">
-                      <a:solidFill>
-                        <a:srgbClr val="111111"/>
-                      </a:solidFill>
-                      <a:prstDash val="solid"/>
-                      <a:round/>
-                      <a:headEnd len="sm" w="sm" type="none"/>
-                      <a:tailEnd len="sm" w="sm" type="none"/>
-                    </a:lnB>
-                    <a:solidFill>
-                      <a:srgbClr val="FFFFFF"/>
-                    </a:solidFill>
-                  </a:tcPr>
-                </a:tc>
-                <a:tc>
-                  <a:txBody>
-                    <a:bodyPr/>
-                    <a:lstStyle/>
-                    <a:p>
-                      <a:pPr indent="0" lvl="0" marL="0" marR="0" rtl="0" algn="l">
-                        <a:spcBef>
-                          <a:spcPts val="0"/>
-                        </a:spcBef>
-                        <a:spcAft>
-                          <a:spcPts val="0"/>
-                        </a:spcAft>
-                        <a:buClr>
-                          <a:srgbClr val="6E6A5E"/>
-                        </a:buClr>
-                        <a:buSzPts val="1050"/>
-                        <a:buFont typeface="Arial"/>
-                        <a:buNone/>
-                      </a:pPr>
-                      <a:r>
-                        <a:rPr i="1" lang="en-US" sz="1050" u="none" cap="none" strike="noStrike">
-                          <a:solidFill>
-                            <a:srgbClr val="6E6A5E"/>
-                          </a:solidFill>
-                          <a:latin typeface="Arial"/>
-                          <a:ea typeface="Arial"/>
-                          <a:cs typeface="Arial"/>
-                          <a:sym typeface="Arial"/>
-                        </a:rPr>
-                        <a:t>[ phone number ]</a:t>
-                      </a:r>
-                      <a:endParaRPr sz="1050" u="none" cap="none" strike="noStrike">
-                        <a:latin typeface="Arial"/>
-                        <a:ea typeface="Arial"/>
-                        <a:cs typeface="Arial"/>
-                        <a:sym typeface="Arial"/>
-                      </a:endParaRPr>
-                    </a:p>
-                  </a:txBody>
-                  <a:tcPr marT="36575" marB="36575" marR="73150" marL="91450" anchor="ctr">
-                    <a:lnL cap="flat" cmpd="sng" w="19050">
-                      <a:solidFill>
-                        <a:srgbClr val="111111"/>
-                      </a:solidFill>
-                      <a:prstDash val="solid"/>
-                      <a:round/>
-                      <a:headEnd len="sm" w="sm" type="none"/>
-                      <a:tailEnd len="sm" w="sm" type="none"/>
-                    </a:lnL>
-                    <a:lnR cap="flat" cmpd="sng" w="19050">
-                      <a:solidFill>
-                        <a:srgbClr val="111111"/>
-                      </a:solidFill>
-                      <a:prstDash val="solid"/>
-                      <a:round/>
-                      <a:headEnd len="sm" w="sm" type="none"/>
-                      <a:tailEnd len="sm" w="sm" type="none"/>
-                    </a:lnR>
-                    <a:lnT cap="flat" cmpd="sng" w="19050">
-                      <a:solidFill>
-                        <a:srgbClr val="111111"/>
-                      </a:solidFill>
-                      <a:prstDash val="solid"/>
-                      <a:round/>
-                      <a:headEnd len="sm" w="sm" type="none"/>
-                      <a:tailEnd len="sm" w="sm" type="none"/>
-                    </a:lnT>
-                    <a:lnB cap="flat" cmpd="sng" w="19050">
-                      <a:solidFill>
-                        <a:srgbClr val="111111"/>
-                      </a:solidFill>
-                      <a:prstDash val="solid"/>
-                      <a:round/>
-                      <a:headEnd len="sm" w="sm" type="none"/>
-                      <a:tailEnd len="sm" w="sm" type="none"/>
-                    </a:lnB>
-                    <a:solidFill>
-                      <a:srgbClr val="FFFFFF"/>
-                    </a:solidFill>
-                  </a:tcPr>
-                </a:tc>
-                <a:tc>
-                  <a:txBody>
-                    <a:bodyPr/>
-                    <a:lstStyle/>
-                    <a:p>
-                      <a:pPr indent="0" lvl="0" marL="0" marR="0" rtl="0" algn="l">
-                        <a:spcBef>
-                          <a:spcPts val="0"/>
-                        </a:spcBef>
-                        <a:spcAft>
-                          <a:spcPts val="0"/>
-                        </a:spcAft>
-                        <a:buClr>
-                          <a:srgbClr val="6E6A5E"/>
-                        </a:buClr>
-                        <a:buSzPts val="1050"/>
-                        <a:buFont typeface="Arial"/>
-                        <a:buNone/>
-                      </a:pPr>
-                      <a:r>
-                        <a:rPr i="1" lang="en-US" sz="1050" u="none" cap="none" strike="noStrike">
-                          <a:solidFill>
-                            <a:srgbClr val="6E6A5E"/>
-                          </a:solidFill>
-                          <a:latin typeface="Arial"/>
-                          <a:ea typeface="Arial"/>
-                          <a:cs typeface="Arial"/>
-                          <a:sym typeface="Arial"/>
-                        </a:rPr>
-                        <a:t>[ email address ]</a:t>
+                        <a:t>sg8268@srmist.edu.in</a:t>
                       </a:r>
                       <a:endParaRPr sz="1050" u="none" cap="none" strike="noStrike">
                         <a:latin typeface="Arial"/>

--- a/deck/causeway-recursion.pptx
+++ b/deck/causeway-recursion.pptx
@@ -3140,7 +3140,7 @@
         <p:spPr>
           <a:xfrm>
             <a:off x="694944" y="274320"/>
-            <a:ext cx="0" cy="292608"/>
+            <a:ext cx="1" cy="292608"/>
           </a:xfrm>
           <a:prstGeom prst="straightConnector1">
             <a:avLst/>
@@ -3166,7 +3166,7 @@
         <p:spPr>
           <a:xfrm>
             <a:off x="694944" y="420624"/>
-            <a:ext cx="146304" cy="0"/>
+            <a:ext cx="146304" cy="1"/>
           </a:xfrm>
           <a:prstGeom prst="straightConnector1">
             <a:avLst/>
@@ -3599,7 +3599,7 @@
         <p:spPr>
           <a:xfrm>
             <a:off x="11256264" y="896112"/>
-            <a:ext cx="0" cy="841248"/>
+            <a:ext cx="1" cy="841248"/>
           </a:xfrm>
           <a:prstGeom prst="straightConnector1">
             <a:avLst/>
@@ -3625,7 +3625,7 @@
         <p:spPr>
           <a:xfrm>
             <a:off x="11256264" y="1316736"/>
-            <a:ext cx="420624" cy="0"/>
+            <a:ext cx="420624" cy="1"/>
           </a:xfrm>
           <a:prstGeom prst="straightConnector1">
             <a:avLst/>
@@ -3651,7 +3651,7 @@
         <p:spPr>
           <a:xfrm>
             <a:off x="11466576" y="1316736"/>
-            <a:ext cx="0" cy="420624"/>
+            <a:ext cx="1" cy="420624"/>
           </a:xfrm>
           <a:prstGeom prst="straightConnector1">
             <a:avLst/>
@@ -3677,7 +3677,7 @@
         <p:spPr>
           <a:xfrm>
             <a:off x="11466576" y="1527048"/>
-            <a:ext cx="210312" cy="0"/>
+            <a:ext cx="210312" cy="1"/>
           </a:xfrm>
           <a:prstGeom prst="straightConnector1">
             <a:avLst/>
@@ -3995,7 +3995,7 @@
         <p:spPr>
           <a:xfrm>
             <a:off x="896112" y="4041648"/>
-            <a:ext cx="6583680" cy="0"/>
+            <a:ext cx="6583680" cy="1"/>
           </a:xfrm>
           <a:prstGeom prst="straightConnector1">
             <a:avLst/>
@@ -4196,7 +4196,7 @@
         <p:spPr>
           <a:xfrm>
             <a:off x="896112" y="4864608"/>
-            <a:ext cx="6583680" cy="0"/>
+            <a:ext cx="6583680" cy="1"/>
           </a:xfrm>
           <a:prstGeom prst="straightConnector1">
             <a:avLst/>
@@ -4397,7 +4397,7 @@
         <p:spPr>
           <a:xfrm>
             <a:off x="896112" y="5779008"/>
-            <a:ext cx="6583680" cy="0"/>
+            <a:ext cx="6583680" cy="1"/>
           </a:xfrm>
           <a:prstGeom prst="straightConnector1">
             <a:avLst/>
@@ -4603,7 +4603,7 @@
         <p:spPr>
           <a:xfrm>
             <a:off x="8430768" y="3822192"/>
-            <a:ext cx="2926080" cy="0"/>
+            <a:ext cx="2926080" cy="1"/>
           </a:xfrm>
           <a:prstGeom prst="straightConnector1">
             <a:avLst/>
@@ -4818,7 +4818,7 @@
         <p:spPr>
           <a:xfrm>
             <a:off x="8430768" y="5541264"/>
-            <a:ext cx="2926080" cy="0"/>
+            <a:ext cx="2926080" cy="1"/>
           </a:xfrm>
           <a:prstGeom prst="straightConnector1">
             <a:avLst/>
@@ -4961,7 +4961,7 @@
         <p:spPr>
           <a:xfrm>
             <a:off x="548640" y="6455664"/>
-            <a:ext cx="11094415" cy="0"/>
+            <a:ext cx="11094415" cy="1"/>
           </a:xfrm>
           <a:prstGeom prst="straightConnector1">
             <a:avLst/>
@@ -5246,7 +5246,7 @@
         <p:spPr>
           <a:xfrm>
             <a:off x="694944" y="274320"/>
-            <a:ext cx="0" cy="292608"/>
+            <a:ext cx="1" cy="292608"/>
           </a:xfrm>
           <a:prstGeom prst="straightConnector1">
             <a:avLst/>
@@ -5272,7 +5272,7 @@
         <p:spPr>
           <a:xfrm>
             <a:off x="694944" y="420624"/>
-            <a:ext cx="146304" cy="0"/>
+            <a:ext cx="146304" cy="1"/>
           </a:xfrm>
           <a:prstGeom prst="straightConnector1">
             <a:avLst/>
@@ -5498,7 +5498,7 @@
         <p:spPr>
           <a:xfrm>
             <a:off x="548640" y="6455664"/>
-            <a:ext cx="11094415" cy="0"/>
+            <a:ext cx="11094415" cy="1"/>
           </a:xfrm>
           <a:prstGeom prst="straightConnector1">
             <a:avLst/>
@@ -7035,7 +7035,7 @@
         <p:spPr>
           <a:xfrm>
             <a:off x="694944" y="274320"/>
-            <a:ext cx="0" cy="292608"/>
+            <a:ext cx="1" cy="292608"/>
           </a:xfrm>
           <a:prstGeom prst="straightConnector1">
             <a:avLst/>
@@ -7061,7 +7061,7 @@
         <p:spPr>
           <a:xfrm>
             <a:off x="694944" y="420624"/>
-            <a:ext cx="146304" cy="0"/>
+            <a:ext cx="146304" cy="1"/>
           </a:xfrm>
           <a:prstGeom prst="straightConnector1">
             <a:avLst/>
@@ -7267,7 +7267,7 @@
         <p:spPr>
           <a:xfrm>
             <a:off x="548640" y="6455664"/>
-            <a:ext cx="11094415" cy="0"/>
+            <a:ext cx="11094415" cy="1"/>
           </a:xfrm>
           <a:prstGeom prst="straightConnector1">
             <a:avLst/>
@@ -7728,7 +7728,7 @@
         <p:spPr>
           <a:xfrm>
             <a:off x="868680" y="4069080"/>
-            <a:ext cx="3291840" cy="0"/>
+            <a:ext cx="3291840" cy="1"/>
           </a:xfrm>
           <a:prstGeom prst="straightConnector1">
             <a:avLst/>
@@ -7867,7 +7867,7 @@
         <p:spPr>
           <a:xfrm>
             <a:off x="1060704" y="5532120"/>
-            <a:ext cx="0" cy="384048"/>
+            <a:ext cx="1" cy="384048"/>
           </a:xfrm>
           <a:prstGeom prst="straightConnector1">
             <a:avLst/>
@@ -7893,7 +7893,7 @@
         <p:spPr>
           <a:xfrm>
             <a:off x="1060704" y="5724144"/>
-            <a:ext cx="192024" cy="0"/>
+            <a:ext cx="192024" cy="1"/>
           </a:xfrm>
           <a:prstGeom prst="straightConnector1">
             <a:avLst/>
@@ -8874,7 +8874,7 @@
         <p:spPr>
           <a:xfrm>
             <a:off x="694944" y="274320"/>
-            <a:ext cx="0" cy="292608"/>
+            <a:ext cx="1" cy="292608"/>
           </a:xfrm>
           <a:prstGeom prst="straightConnector1">
             <a:avLst/>
@@ -8900,7 +8900,7 @@
         <p:spPr>
           <a:xfrm>
             <a:off x="694944" y="420624"/>
-            <a:ext cx="146304" cy="0"/>
+            <a:ext cx="146304" cy="1"/>
           </a:xfrm>
           <a:prstGeom prst="straightConnector1">
             <a:avLst/>
@@ -9106,7 +9106,7 @@
         <p:spPr>
           <a:xfrm>
             <a:off x="548640" y="6455664"/>
-            <a:ext cx="11094415" cy="0"/>
+            <a:ext cx="11094415" cy="1"/>
           </a:xfrm>
           <a:prstGeom prst="straightConnector1">
             <a:avLst/>
@@ -9618,7 +9618,7 @@
         <p:spPr>
           <a:xfrm>
             <a:off x="2848356" y="2825496"/>
-            <a:ext cx="237744" cy="0"/>
+            <a:ext cx="237744" cy="1"/>
           </a:xfrm>
           <a:prstGeom prst="straightConnector1">
             <a:avLst/>
@@ -9761,7 +9761,7 @@
         <p:spPr>
           <a:xfrm>
             <a:off x="4613148" y="2825496"/>
-            <a:ext cx="237744" cy="0"/>
+            <a:ext cx="237744" cy="1"/>
           </a:xfrm>
           <a:prstGeom prst="straightConnector1">
             <a:avLst/>
@@ -9904,7 +9904,7 @@
         <p:spPr>
           <a:xfrm>
             <a:off x="6743700" y="2825496"/>
-            <a:ext cx="237744" cy="0"/>
+            <a:ext cx="237744" cy="1"/>
           </a:xfrm>
           <a:prstGeom prst="straightConnector1">
             <a:avLst/>
@@ -10047,7 +10047,7 @@
         <p:spPr>
           <a:xfrm>
             <a:off x="9422892" y="2825496"/>
-            <a:ext cx="237744" cy="0"/>
+            <a:ext cx="237744" cy="1"/>
           </a:xfrm>
           <a:prstGeom prst="straightConnector1">
             <a:avLst/>
@@ -11217,7 +11217,7 @@
         <p:spPr>
           <a:xfrm>
             <a:off x="694944" y="274320"/>
-            <a:ext cx="0" cy="292608"/>
+            <a:ext cx="1" cy="292608"/>
           </a:xfrm>
           <a:prstGeom prst="straightConnector1">
             <a:avLst/>
@@ -11243,7 +11243,7 @@
         <p:spPr>
           <a:xfrm>
             <a:off x="694944" y="420624"/>
-            <a:ext cx="146304" cy="0"/>
+            <a:ext cx="146304" cy="1"/>
           </a:xfrm>
           <a:prstGeom prst="straightConnector1">
             <a:avLst/>
@@ -11449,7 +11449,7 @@
         <p:spPr>
           <a:xfrm>
             <a:off x="548640" y="6455664"/>
-            <a:ext cx="11094415" cy="0"/>
+            <a:ext cx="11094415" cy="1"/>
           </a:xfrm>
           <a:prstGeom prst="straightConnector1">
             <a:avLst/>
@@ -13070,7 +13070,7 @@
         <p:spPr>
           <a:xfrm>
             <a:off x="694944" y="274320"/>
-            <a:ext cx="0" cy="292608"/>
+            <a:ext cx="1" cy="292608"/>
           </a:xfrm>
           <a:prstGeom prst="straightConnector1">
             <a:avLst/>
@@ -13096,7 +13096,7 @@
         <p:spPr>
           <a:xfrm>
             <a:off x="694944" y="420624"/>
-            <a:ext cx="146304" cy="0"/>
+            <a:ext cx="146304" cy="1"/>
           </a:xfrm>
           <a:prstGeom prst="straightConnector1">
             <a:avLst/>
@@ -13302,7 +13302,7 @@
         <p:spPr>
           <a:xfrm>
             <a:off x="548640" y="6455664"/>
-            <a:ext cx="11094415" cy="0"/>
+            <a:ext cx="11094415" cy="1"/>
           </a:xfrm>
           <a:prstGeom prst="straightConnector1">
             <a:avLst/>
@@ -15133,7 +15133,7 @@
         <p:spPr>
           <a:xfrm>
             <a:off x="694944" y="274320"/>
-            <a:ext cx="0" cy="292608"/>
+            <a:ext cx="1" cy="292608"/>
           </a:xfrm>
           <a:prstGeom prst="straightConnector1">
             <a:avLst/>
@@ -15159,7 +15159,7 @@
         <p:spPr>
           <a:xfrm>
             <a:off x="694944" y="420624"/>
-            <a:ext cx="146304" cy="0"/>
+            <a:ext cx="146304" cy="1"/>
           </a:xfrm>
           <a:prstGeom prst="straightConnector1">
             <a:avLst/>
@@ -15365,7 +15365,7 @@
         <p:spPr>
           <a:xfrm>
             <a:off x="548640" y="6455664"/>
-            <a:ext cx="11094415" cy="0"/>
+            <a:ext cx="11094415" cy="1"/>
           </a:xfrm>
           <a:prstGeom prst="straightConnector1">
             <a:avLst/>
@@ -18298,7 +18298,7 @@
         <p:spPr>
           <a:xfrm>
             <a:off x="694944" y="274320"/>
-            <a:ext cx="0" cy="292608"/>
+            <a:ext cx="1" cy="292608"/>
           </a:xfrm>
           <a:prstGeom prst="straightConnector1">
             <a:avLst/>
@@ -18324,7 +18324,7 @@
         <p:spPr>
           <a:xfrm>
             <a:off x="694944" y="420624"/>
-            <a:ext cx="146304" cy="0"/>
+            <a:ext cx="146304" cy="1"/>
           </a:xfrm>
           <a:prstGeom prst="straightConnector1">
             <a:avLst/>
@@ -18530,7 +18530,7 @@
         <p:spPr>
           <a:xfrm>
             <a:off x="548640" y="6455664"/>
-            <a:ext cx="11094415" cy="0"/>
+            <a:ext cx="11094415" cy="1"/>
           </a:xfrm>
           <a:prstGeom prst="straightConnector1">
             <a:avLst/>
@@ -18909,7 +18909,7 @@
         <p:spPr>
           <a:xfrm>
             <a:off x="1060704" y="5532120"/>
-            <a:ext cx="0" cy="384048"/>
+            <a:ext cx="1" cy="384048"/>
           </a:xfrm>
           <a:prstGeom prst="straightConnector1">
             <a:avLst/>
@@ -18935,7 +18935,7 @@
         <p:spPr>
           <a:xfrm>
             <a:off x="1060704" y="5724144"/>
-            <a:ext cx="192024" cy="0"/>
+            <a:ext cx="192024" cy="1"/>
           </a:xfrm>
           <a:prstGeom prst="straightConnector1">
             <a:avLst/>
@@ -19064,7 +19064,7 @@
         <p:spPr>
           <a:xfrm>
             <a:off x="694944" y="274320"/>
-            <a:ext cx="0" cy="292608"/>
+            <a:ext cx="1" cy="292608"/>
           </a:xfrm>
           <a:prstGeom prst="straightConnector1">
             <a:avLst/>
@@ -19090,7 +19090,7 @@
         <p:spPr>
           <a:xfrm>
             <a:off x="694944" y="420624"/>
-            <a:ext cx="146304" cy="0"/>
+            <a:ext cx="146304" cy="1"/>
           </a:xfrm>
           <a:prstGeom prst="straightConnector1">
             <a:avLst/>
@@ -19296,7 +19296,7 @@
         <p:spPr>
           <a:xfrm>
             <a:off x="548640" y="6455664"/>
-            <a:ext cx="11094415" cy="0"/>
+            <a:ext cx="11094415" cy="1"/>
           </a:xfrm>
           <a:prstGeom prst="straightConnector1">
             <a:avLst/>
@@ -20112,7 +20112,7 @@
                           <a:cs typeface="Arial"/>
                           <a:sym typeface="Arial"/>
                         </a:rPr>
-                        <a:t>—</a:t>
+                        <a:t>9042769952</a:t>
                       </a:r>
                       <a:endParaRPr sz="1050" u="none" cap="none" strike="noStrike">
                         <a:latin typeface="Arial"/>
@@ -20357,7 +20357,7 @@
                           <a:cs typeface="Arial"/>
                           <a:sym typeface="Arial"/>
                         </a:rPr>
-                        <a:t>—</a:t>
+                        <a:t>+91 93449 11072</a:t>
                       </a:r>
                       <a:endParaRPr sz="1050" u="none" cap="none" strike="noStrike">
                         <a:latin typeface="Arial"/>
@@ -20602,7 +20602,7 @@
                           <a:cs typeface="Arial"/>
                           <a:sym typeface="Arial"/>
                         </a:rPr>
-                        <a:t>—</a:t>
+                        <a:t>+91 91 22 0444 45</a:t>
                       </a:r>
                       <a:endParaRPr sz="1050" u="none" cap="none" strike="noStrike">
                         <a:latin typeface="Arial"/>
@@ -20850,7 +20850,7 @@
         <p:spPr>
           <a:xfrm>
             <a:off x="11155680" y="5870448"/>
-            <a:ext cx="0" cy="365760"/>
+            <a:ext cx="1" cy="365760"/>
           </a:xfrm>
           <a:prstGeom prst="straightConnector1">
             <a:avLst/>
@@ -20876,7 +20876,7 @@
         <p:spPr>
           <a:xfrm>
             <a:off x="11155680" y="6053328"/>
-            <a:ext cx="182880" cy="0"/>
+            <a:ext cx="182880" cy="1"/>
           </a:xfrm>
           <a:prstGeom prst="straightConnector1">
             <a:avLst/>

--- a/deck/causeway-recursion.pptx
+++ b/deck/causeway-recursion.pptx
@@ -3131,58 +3131,60 @@
           </a:p>
         </p:txBody>
       </p:sp>
-      <p:cxnSp>
-        <p:nvCxnSpPr>
+      <p:sp>
+        <p:nvSpPr>
           <p:cNvPr id="13" name="Google Shape;13;p1"/>
-          <p:cNvCxnSpPr/>
-          <p:nvPr/>
-        </p:nvCxnSpPr>
-        <p:spPr>
-          <a:xfrm>
-            <a:off x="694944" y="274320"/>
-            <a:ext cx="1" cy="292608"/>
-          </a:xfrm>
-          <a:prstGeom prst="straightConnector1">
-            <a:avLst/>
-          </a:prstGeom>
-          <a:noFill/>
-          <a:ln cap="flat" cmpd="sng" w="25400">
-            <a:solidFill>
-              <a:srgbClr val="111111"/>
-            </a:solidFill>
-            <a:prstDash val="solid"/>
-            <a:round/>
-            <a:headEnd len="sm" w="sm" type="none"/>
-            <a:tailEnd len="sm" w="sm" type="none"/>
-          </a:ln>
-        </p:spPr>
-      </p:cxnSp>
-      <p:cxnSp>
-        <p:nvCxnSpPr>
+          <p:cNvSpPr/>
+          <p:nvPr/>
+        </p:nvSpPr>
+        <p:spPr>
+          <a:xfrm>
+            <a:off x="682244" y="274320"/>
+            <a:ext cx="25400" cy="292608"/>
+          </a:xfrm>
+          <a:prstGeom prst="rect">
+            <a:avLst/>
+          </a:prstGeom>
+          <a:solidFill>
+            <a:srgbClr val="111111"/>
+          </a:solidFill>
+          <a:ln>
+            <a:noFill/>
+          </a:ln>
+        </p:spPr>
+        <p:txBody>
+          <a:bodyPr/>
+          <a:lstStyle/>
+          <a:p/>
+        </p:txBody>
+      </p:sp>
+      <p:sp>
+        <p:nvSpPr>
           <p:cNvPr id="14" name="Google Shape;14;p1"/>
-          <p:cNvCxnSpPr/>
-          <p:nvPr/>
-        </p:nvCxnSpPr>
-        <p:spPr>
-          <a:xfrm>
-            <a:off x="694944" y="420624"/>
-            <a:ext cx="146304" cy="1"/>
-          </a:xfrm>
-          <a:prstGeom prst="straightConnector1">
-            <a:avLst/>
-          </a:prstGeom>
-          <a:noFill/>
-          <a:ln cap="flat" cmpd="sng" w="25400">
-            <a:solidFill>
-              <a:srgbClr val="111111"/>
-            </a:solidFill>
-            <a:prstDash val="solid"/>
-            <a:round/>
-            <a:headEnd len="sm" w="sm" type="none"/>
-            <a:tailEnd len="sm" w="sm" type="none"/>
-          </a:ln>
-        </p:spPr>
-      </p:cxnSp>
+          <p:cNvSpPr/>
+          <p:nvPr/>
+        </p:nvSpPr>
+        <p:spPr>
+          <a:xfrm>
+            <a:off x="694944" y="407924"/>
+            <a:ext cx="146304" cy="25400"/>
+          </a:xfrm>
+          <a:prstGeom prst="rect">
+            <a:avLst/>
+          </a:prstGeom>
+          <a:solidFill>
+            <a:srgbClr val="111111"/>
+          </a:solidFill>
+          <a:ln>
+            <a:noFill/>
+          </a:ln>
+        </p:spPr>
+        <p:txBody>
+          <a:bodyPr/>
+          <a:lstStyle/>
+          <a:p/>
+        </p:txBody>
+      </p:sp>
       <p:sp>
         <p:nvSpPr>
           <p:cNvPr id="15" name="Google Shape;15;p1"/>
@@ -3590,110 +3592,114 @@
           </a:p>
         </p:txBody>
       </p:sp>
-      <p:cxnSp>
-        <p:nvCxnSpPr>
+      <p:sp>
+        <p:nvSpPr>
           <p:cNvPr id="22" name="Google Shape;22;p1"/>
-          <p:cNvCxnSpPr/>
-          <p:nvPr/>
-        </p:nvCxnSpPr>
-        <p:spPr>
-          <a:xfrm>
-            <a:off x="11256264" y="896112"/>
-            <a:ext cx="1" cy="841248"/>
-          </a:xfrm>
-          <a:prstGeom prst="straightConnector1">
-            <a:avLst/>
-          </a:prstGeom>
-          <a:noFill/>
-          <a:ln cap="flat" cmpd="sng" w="31750">
-            <a:solidFill>
-              <a:srgbClr val="111111"/>
-            </a:solidFill>
-            <a:prstDash val="solid"/>
-            <a:round/>
-            <a:headEnd len="sm" w="sm" type="none"/>
-            <a:tailEnd len="sm" w="sm" type="none"/>
-          </a:ln>
-        </p:spPr>
-      </p:cxnSp>
-      <p:cxnSp>
-        <p:nvCxnSpPr>
+          <p:cNvSpPr/>
+          <p:nvPr/>
+        </p:nvSpPr>
+        <p:spPr>
+          <a:xfrm>
+            <a:off x="11240389" y="896112"/>
+            <a:ext cx="31750" cy="841248"/>
+          </a:xfrm>
+          <a:prstGeom prst="rect">
+            <a:avLst/>
+          </a:prstGeom>
+          <a:solidFill>
+            <a:srgbClr val="111111"/>
+          </a:solidFill>
+          <a:ln>
+            <a:noFill/>
+          </a:ln>
+        </p:spPr>
+        <p:txBody>
+          <a:bodyPr/>
+          <a:lstStyle/>
+          <a:p/>
+        </p:txBody>
+      </p:sp>
+      <p:sp>
+        <p:nvSpPr>
           <p:cNvPr id="23" name="Google Shape;23;p1"/>
-          <p:cNvCxnSpPr/>
-          <p:nvPr/>
-        </p:nvCxnSpPr>
-        <p:spPr>
-          <a:xfrm>
-            <a:off x="11256264" y="1316736"/>
-            <a:ext cx="420624" cy="1"/>
-          </a:xfrm>
-          <a:prstGeom prst="straightConnector1">
-            <a:avLst/>
-          </a:prstGeom>
-          <a:noFill/>
-          <a:ln cap="flat" cmpd="sng" w="31750">
-            <a:solidFill>
-              <a:srgbClr val="111111"/>
-            </a:solidFill>
-            <a:prstDash val="solid"/>
-            <a:round/>
-            <a:headEnd len="sm" w="sm" type="none"/>
-            <a:tailEnd len="sm" w="sm" type="none"/>
-          </a:ln>
-        </p:spPr>
-      </p:cxnSp>
-      <p:cxnSp>
-        <p:nvCxnSpPr>
+          <p:cNvSpPr/>
+          <p:nvPr/>
+        </p:nvSpPr>
+        <p:spPr>
+          <a:xfrm>
+            <a:off x="11256264" y="1300861"/>
+            <a:ext cx="420624" cy="31750"/>
+          </a:xfrm>
+          <a:prstGeom prst="rect">
+            <a:avLst/>
+          </a:prstGeom>
+          <a:solidFill>
+            <a:srgbClr val="111111"/>
+          </a:solidFill>
+          <a:ln>
+            <a:noFill/>
+          </a:ln>
+        </p:spPr>
+        <p:txBody>
+          <a:bodyPr/>
+          <a:lstStyle/>
+          <a:p/>
+        </p:txBody>
+      </p:sp>
+      <p:sp>
+        <p:nvSpPr>
           <p:cNvPr id="24" name="Google Shape;24;p1"/>
-          <p:cNvCxnSpPr/>
-          <p:nvPr/>
-        </p:nvCxnSpPr>
-        <p:spPr>
-          <a:xfrm>
-            <a:off x="11466576" y="1316736"/>
-            <a:ext cx="1" cy="420624"/>
-          </a:xfrm>
-          <a:prstGeom prst="straightConnector1">
-            <a:avLst/>
-          </a:prstGeom>
-          <a:noFill/>
-          <a:ln cap="flat" cmpd="sng" w="31750">
-            <a:solidFill>
-              <a:srgbClr val="111111"/>
-            </a:solidFill>
-            <a:prstDash val="solid"/>
-            <a:round/>
-            <a:headEnd len="sm" w="sm" type="none"/>
-            <a:tailEnd len="sm" w="sm" type="none"/>
-          </a:ln>
-        </p:spPr>
-      </p:cxnSp>
-      <p:cxnSp>
-        <p:nvCxnSpPr>
+          <p:cNvSpPr/>
+          <p:nvPr/>
+        </p:nvSpPr>
+        <p:spPr>
+          <a:xfrm>
+            <a:off x="11450701" y="1316736"/>
+            <a:ext cx="31750" cy="420624"/>
+          </a:xfrm>
+          <a:prstGeom prst="rect">
+            <a:avLst/>
+          </a:prstGeom>
+          <a:solidFill>
+            <a:srgbClr val="111111"/>
+          </a:solidFill>
+          <a:ln>
+            <a:noFill/>
+          </a:ln>
+        </p:spPr>
+        <p:txBody>
+          <a:bodyPr/>
+          <a:lstStyle/>
+          <a:p/>
+        </p:txBody>
+      </p:sp>
+      <p:sp>
+        <p:nvSpPr>
           <p:cNvPr id="25" name="Google Shape;25;p1"/>
-          <p:cNvCxnSpPr/>
-          <p:nvPr/>
-        </p:nvCxnSpPr>
-        <p:spPr>
-          <a:xfrm>
-            <a:off x="11466576" y="1527048"/>
-            <a:ext cx="210312" cy="1"/>
-          </a:xfrm>
-          <a:prstGeom prst="straightConnector1">
-            <a:avLst/>
-          </a:prstGeom>
-          <a:noFill/>
-          <a:ln cap="flat" cmpd="sng" w="31750">
-            <a:solidFill>
-              <a:srgbClr val="111111"/>
-            </a:solidFill>
-            <a:prstDash val="solid"/>
-            <a:round/>
-            <a:headEnd len="sm" w="sm" type="none"/>
-            <a:tailEnd len="sm" w="sm" type="none"/>
-          </a:ln>
-        </p:spPr>
-      </p:cxnSp>
+          <p:cNvSpPr/>
+          <p:nvPr/>
+        </p:nvSpPr>
+        <p:spPr>
+          <a:xfrm>
+            <a:off x="11466576" y="1511173"/>
+            <a:ext cx="210312" cy="31750"/>
+          </a:xfrm>
+          <a:prstGeom prst="rect">
+            <a:avLst/>
+          </a:prstGeom>
+          <a:solidFill>
+            <a:srgbClr val="111111"/>
+          </a:solidFill>
+          <a:ln>
+            <a:noFill/>
+          </a:ln>
+        </p:spPr>
+        <p:txBody>
+          <a:bodyPr/>
+          <a:lstStyle/>
+          <a:p/>
+        </p:txBody>
+      </p:sp>
       <p:sp>
         <p:nvSpPr>
           <p:cNvPr id="26" name="Google Shape;26;p1"/>
@@ -3986,32 +3992,33 @@
           </a:p>
         </p:txBody>
       </p:sp>
-      <p:cxnSp>
-        <p:nvCxnSpPr>
+      <p:sp>
+        <p:nvSpPr>
           <p:cNvPr id="31" name="Google Shape;31;p1"/>
-          <p:cNvCxnSpPr/>
-          <p:nvPr/>
-        </p:nvCxnSpPr>
-        <p:spPr>
-          <a:xfrm>
-            <a:off x="896112" y="4041648"/>
-            <a:ext cx="6583680" cy="1"/>
-          </a:xfrm>
-          <a:prstGeom prst="straightConnector1">
-            <a:avLst/>
-          </a:prstGeom>
-          <a:noFill/>
-          <a:ln cap="flat" cmpd="sng" w="19050">
-            <a:solidFill>
-              <a:srgbClr val="111111"/>
-            </a:solidFill>
-            <a:prstDash val="solid"/>
-            <a:round/>
-            <a:headEnd len="sm" w="sm" type="none"/>
-            <a:tailEnd len="sm" w="sm" type="none"/>
-          </a:ln>
-        </p:spPr>
-      </p:cxnSp>
+          <p:cNvSpPr/>
+          <p:nvPr/>
+        </p:nvSpPr>
+        <p:spPr>
+          <a:xfrm>
+            <a:off x="896112" y="4032123"/>
+            <a:ext cx="6583680" cy="19050"/>
+          </a:xfrm>
+          <a:prstGeom prst="rect">
+            <a:avLst/>
+          </a:prstGeom>
+          <a:solidFill>
+            <a:srgbClr val="111111"/>
+          </a:solidFill>
+          <a:ln>
+            <a:noFill/>
+          </a:ln>
+        </p:spPr>
+        <p:txBody>
+          <a:bodyPr/>
+          <a:lstStyle/>
+          <a:p/>
+        </p:txBody>
+      </p:sp>
       <p:sp>
         <p:nvSpPr>
           <p:cNvPr id="32" name="Google Shape;32;p1"/>
@@ -4187,32 +4194,33 @@
           </a:p>
         </p:txBody>
       </p:sp>
-      <p:cxnSp>
-        <p:nvCxnSpPr>
+      <p:sp>
+        <p:nvSpPr>
           <p:cNvPr id="35" name="Google Shape;35;p1"/>
-          <p:cNvCxnSpPr/>
-          <p:nvPr/>
-        </p:nvCxnSpPr>
-        <p:spPr>
-          <a:xfrm>
-            <a:off x="896112" y="4864608"/>
-            <a:ext cx="6583680" cy="1"/>
-          </a:xfrm>
-          <a:prstGeom prst="straightConnector1">
-            <a:avLst/>
-          </a:prstGeom>
-          <a:noFill/>
-          <a:ln cap="flat" cmpd="sng" w="19050">
-            <a:solidFill>
-              <a:srgbClr val="111111"/>
-            </a:solidFill>
-            <a:prstDash val="solid"/>
-            <a:round/>
-            <a:headEnd len="sm" w="sm" type="none"/>
-            <a:tailEnd len="sm" w="sm" type="none"/>
-          </a:ln>
-        </p:spPr>
-      </p:cxnSp>
+          <p:cNvSpPr/>
+          <p:nvPr/>
+        </p:nvSpPr>
+        <p:spPr>
+          <a:xfrm>
+            <a:off x="896112" y="4855083"/>
+            <a:ext cx="6583680" cy="19050"/>
+          </a:xfrm>
+          <a:prstGeom prst="rect">
+            <a:avLst/>
+          </a:prstGeom>
+          <a:solidFill>
+            <a:srgbClr val="111111"/>
+          </a:solidFill>
+          <a:ln>
+            <a:noFill/>
+          </a:ln>
+        </p:spPr>
+        <p:txBody>
+          <a:bodyPr/>
+          <a:lstStyle/>
+          <a:p/>
+        </p:txBody>
+      </p:sp>
       <p:sp>
         <p:nvSpPr>
           <p:cNvPr id="36" name="Google Shape;36;p1"/>
@@ -4388,32 +4396,33 @@
           </a:p>
         </p:txBody>
       </p:sp>
-      <p:cxnSp>
-        <p:nvCxnSpPr>
+      <p:sp>
+        <p:nvSpPr>
           <p:cNvPr id="39" name="Google Shape;39;p1"/>
-          <p:cNvCxnSpPr/>
-          <p:nvPr/>
-        </p:nvCxnSpPr>
-        <p:spPr>
-          <a:xfrm>
-            <a:off x="896112" y="5779008"/>
-            <a:ext cx="6583680" cy="1"/>
-          </a:xfrm>
-          <a:prstGeom prst="straightConnector1">
-            <a:avLst/>
-          </a:prstGeom>
-          <a:noFill/>
-          <a:ln cap="flat" cmpd="sng" w="19050">
-            <a:solidFill>
-              <a:srgbClr val="111111"/>
-            </a:solidFill>
-            <a:prstDash val="solid"/>
-            <a:round/>
-            <a:headEnd len="sm" w="sm" type="none"/>
-            <a:tailEnd len="sm" w="sm" type="none"/>
-          </a:ln>
-        </p:spPr>
-      </p:cxnSp>
+          <p:cNvSpPr/>
+          <p:nvPr/>
+        </p:nvSpPr>
+        <p:spPr>
+          <a:xfrm>
+            <a:off x="896112" y="5769483"/>
+            <a:ext cx="6583680" cy="19050"/>
+          </a:xfrm>
+          <a:prstGeom prst="rect">
+            <a:avLst/>
+          </a:prstGeom>
+          <a:solidFill>
+            <a:srgbClr val="111111"/>
+          </a:solidFill>
+          <a:ln>
+            <a:noFill/>
+          </a:ln>
+        </p:spPr>
+        <p:txBody>
+          <a:bodyPr/>
+          <a:lstStyle/>
+          <a:p/>
+        </p:txBody>
+      </p:sp>
       <p:sp>
         <p:nvSpPr>
           <p:cNvPr id="40" name="Google Shape;40;p1"/>
@@ -4594,32 +4603,33 @@
           </a:p>
         </p:txBody>
       </p:sp>
-      <p:cxnSp>
-        <p:nvCxnSpPr>
+      <p:sp>
+        <p:nvSpPr>
           <p:cNvPr id="43" name="Google Shape;43;p1"/>
-          <p:cNvCxnSpPr/>
-          <p:nvPr/>
-        </p:nvCxnSpPr>
-        <p:spPr>
-          <a:xfrm>
-            <a:off x="8430768" y="3822192"/>
-            <a:ext cx="2926080" cy="1"/>
-          </a:xfrm>
-          <a:prstGeom prst="straightConnector1">
-            <a:avLst/>
-          </a:prstGeom>
-          <a:noFill/>
-          <a:ln cap="flat" cmpd="sng" w="19050">
-            <a:solidFill>
-              <a:srgbClr val="FAF4E8"/>
-            </a:solidFill>
-            <a:prstDash val="solid"/>
-            <a:round/>
-            <a:headEnd len="sm" w="sm" type="none"/>
-            <a:tailEnd len="sm" w="sm" type="none"/>
-          </a:ln>
-        </p:spPr>
-      </p:cxnSp>
+          <p:cNvSpPr/>
+          <p:nvPr/>
+        </p:nvSpPr>
+        <p:spPr>
+          <a:xfrm>
+            <a:off x="8430768" y="3812667"/>
+            <a:ext cx="2926080" cy="19050"/>
+          </a:xfrm>
+          <a:prstGeom prst="rect">
+            <a:avLst/>
+          </a:prstGeom>
+          <a:solidFill>
+            <a:srgbClr val="FAF4E8"/>
+          </a:solidFill>
+          <a:ln>
+            <a:noFill/>
+          </a:ln>
+        </p:spPr>
+        <p:txBody>
+          <a:bodyPr/>
+          <a:lstStyle/>
+          <a:p/>
+        </p:txBody>
+      </p:sp>
       <p:sp>
         <p:nvSpPr>
           <p:cNvPr id="44" name="Google Shape;44;p1"/>
@@ -4809,32 +4819,33 @@
           </a:p>
         </p:txBody>
       </p:sp>
-      <p:cxnSp>
-        <p:nvCxnSpPr>
+      <p:sp>
+        <p:nvSpPr>
           <p:cNvPr id="49" name="Google Shape;49;p1"/>
-          <p:cNvCxnSpPr/>
-          <p:nvPr/>
-        </p:nvCxnSpPr>
-        <p:spPr>
-          <a:xfrm>
-            <a:off x="8430768" y="5541264"/>
-            <a:ext cx="2926080" cy="1"/>
-          </a:xfrm>
-          <a:prstGeom prst="straightConnector1">
-            <a:avLst/>
-          </a:prstGeom>
-          <a:noFill/>
-          <a:ln cap="flat" cmpd="sng" w="19050">
-            <a:solidFill>
-              <a:srgbClr val="FAF4E8"/>
-            </a:solidFill>
-            <a:prstDash val="solid"/>
-            <a:round/>
-            <a:headEnd len="sm" w="sm" type="none"/>
-            <a:tailEnd len="sm" w="sm" type="none"/>
-          </a:ln>
-        </p:spPr>
-      </p:cxnSp>
+          <p:cNvSpPr/>
+          <p:nvPr/>
+        </p:nvSpPr>
+        <p:spPr>
+          <a:xfrm>
+            <a:off x="8430768" y="5531739"/>
+            <a:ext cx="2926080" cy="19050"/>
+          </a:xfrm>
+          <a:prstGeom prst="rect">
+            <a:avLst/>
+          </a:prstGeom>
+          <a:solidFill>
+            <a:srgbClr val="FAF4E8"/>
+          </a:solidFill>
+          <a:ln>
+            <a:noFill/>
+          </a:ln>
+        </p:spPr>
+        <p:txBody>
+          <a:bodyPr/>
+          <a:lstStyle/>
+          <a:p/>
+        </p:txBody>
+      </p:sp>
       <p:sp>
         <p:nvSpPr>
           <p:cNvPr id="50" name="Google Shape;50;p1"/>
@@ -4952,32 +4963,33 @@
           </a:p>
         </p:txBody>
       </p:sp>
-      <p:cxnSp>
-        <p:nvCxnSpPr>
+      <p:sp>
+        <p:nvSpPr>
           <p:cNvPr id="52" name="Google Shape;52;p1"/>
-          <p:cNvCxnSpPr/>
-          <p:nvPr/>
-        </p:nvCxnSpPr>
-        <p:spPr>
-          <a:xfrm>
-            <a:off x="548640" y="6455664"/>
-            <a:ext cx="11094415" cy="1"/>
-          </a:xfrm>
-          <a:prstGeom prst="straightConnector1">
-            <a:avLst/>
-          </a:prstGeom>
-          <a:noFill/>
-          <a:ln cap="flat" cmpd="sng" w="28575">
-            <a:solidFill>
-              <a:srgbClr val="111111"/>
-            </a:solidFill>
-            <a:prstDash val="solid"/>
-            <a:round/>
-            <a:headEnd len="sm" w="sm" type="none"/>
-            <a:tailEnd len="sm" w="sm" type="none"/>
-          </a:ln>
-        </p:spPr>
-      </p:cxnSp>
+          <p:cNvSpPr/>
+          <p:nvPr/>
+        </p:nvSpPr>
+        <p:spPr>
+          <a:xfrm>
+            <a:off x="548640" y="6441377"/>
+            <a:ext cx="11094415" cy="28575"/>
+          </a:xfrm>
+          <a:prstGeom prst="rect">
+            <a:avLst/>
+          </a:prstGeom>
+          <a:solidFill>
+            <a:srgbClr val="111111"/>
+          </a:solidFill>
+          <a:ln>
+            <a:noFill/>
+          </a:ln>
+        </p:spPr>
+        <p:txBody>
+          <a:bodyPr/>
+          <a:lstStyle/>
+          <a:p/>
+        </p:txBody>
+      </p:sp>
       <p:sp>
         <p:nvSpPr>
           <p:cNvPr id="53" name="Google Shape;53;p1"/>
@@ -5237,58 +5249,60 @@
           </a:p>
         </p:txBody>
       </p:sp>
-      <p:cxnSp>
-        <p:nvCxnSpPr>
+      <p:sp>
+        <p:nvSpPr>
           <p:cNvPr id="62" name="Google Shape;62;p2"/>
-          <p:cNvCxnSpPr/>
-          <p:nvPr/>
-        </p:nvCxnSpPr>
-        <p:spPr>
-          <a:xfrm>
-            <a:off x="694944" y="274320"/>
-            <a:ext cx="1" cy="292608"/>
-          </a:xfrm>
-          <a:prstGeom prst="straightConnector1">
-            <a:avLst/>
-          </a:prstGeom>
-          <a:noFill/>
-          <a:ln cap="flat" cmpd="sng" w="25400">
-            <a:solidFill>
-              <a:srgbClr val="111111"/>
-            </a:solidFill>
-            <a:prstDash val="solid"/>
-            <a:round/>
-            <a:headEnd len="sm" w="sm" type="none"/>
-            <a:tailEnd len="sm" w="sm" type="none"/>
-          </a:ln>
-        </p:spPr>
-      </p:cxnSp>
-      <p:cxnSp>
-        <p:nvCxnSpPr>
+          <p:cNvSpPr/>
+          <p:nvPr/>
+        </p:nvSpPr>
+        <p:spPr>
+          <a:xfrm>
+            <a:off x="682244" y="274320"/>
+            <a:ext cx="25400" cy="292608"/>
+          </a:xfrm>
+          <a:prstGeom prst="rect">
+            <a:avLst/>
+          </a:prstGeom>
+          <a:solidFill>
+            <a:srgbClr val="111111"/>
+          </a:solidFill>
+          <a:ln>
+            <a:noFill/>
+          </a:ln>
+        </p:spPr>
+        <p:txBody>
+          <a:bodyPr/>
+          <a:lstStyle/>
+          <a:p/>
+        </p:txBody>
+      </p:sp>
+      <p:sp>
+        <p:nvSpPr>
           <p:cNvPr id="63" name="Google Shape;63;p2"/>
-          <p:cNvCxnSpPr/>
-          <p:nvPr/>
-        </p:nvCxnSpPr>
-        <p:spPr>
-          <a:xfrm>
-            <a:off x="694944" y="420624"/>
-            <a:ext cx="146304" cy="1"/>
-          </a:xfrm>
-          <a:prstGeom prst="straightConnector1">
-            <a:avLst/>
-          </a:prstGeom>
-          <a:noFill/>
-          <a:ln cap="flat" cmpd="sng" w="25400">
-            <a:solidFill>
-              <a:srgbClr val="111111"/>
-            </a:solidFill>
-            <a:prstDash val="solid"/>
-            <a:round/>
-            <a:headEnd len="sm" w="sm" type="none"/>
-            <a:tailEnd len="sm" w="sm" type="none"/>
-          </a:ln>
-        </p:spPr>
-      </p:cxnSp>
+          <p:cNvSpPr/>
+          <p:nvPr/>
+        </p:nvSpPr>
+        <p:spPr>
+          <a:xfrm>
+            <a:off x="694944" y="407924"/>
+            <a:ext cx="146304" cy="25400"/>
+          </a:xfrm>
+          <a:prstGeom prst="rect">
+            <a:avLst/>
+          </a:prstGeom>
+          <a:solidFill>
+            <a:srgbClr val="111111"/>
+          </a:solidFill>
+          <a:ln>
+            <a:noFill/>
+          </a:ln>
+        </p:spPr>
+        <p:txBody>
+          <a:bodyPr/>
+          <a:lstStyle/>
+          <a:p/>
+        </p:txBody>
+      </p:sp>
       <p:sp>
         <p:nvSpPr>
           <p:cNvPr id="64" name="Google Shape;64;p2"/>
@@ -5489,32 +5503,33 @@
           </a:p>
         </p:txBody>
       </p:sp>
-      <p:cxnSp>
-        <p:nvCxnSpPr>
+      <p:sp>
+        <p:nvSpPr>
           <p:cNvPr id="67" name="Google Shape;67;p2"/>
-          <p:cNvCxnSpPr/>
-          <p:nvPr/>
-        </p:nvCxnSpPr>
-        <p:spPr>
-          <a:xfrm>
-            <a:off x="548640" y="6455664"/>
-            <a:ext cx="11094415" cy="1"/>
-          </a:xfrm>
-          <a:prstGeom prst="straightConnector1">
-            <a:avLst/>
-          </a:prstGeom>
-          <a:noFill/>
-          <a:ln cap="flat" cmpd="sng" w="28575">
-            <a:solidFill>
-              <a:srgbClr val="111111"/>
-            </a:solidFill>
-            <a:prstDash val="solid"/>
-            <a:round/>
-            <a:headEnd len="sm" w="sm" type="none"/>
-            <a:tailEnd len="sm" w="sm" type="none"/>
-          </a:ln>
-        </p:spPr>
-      </p:cxnSp>
+          <p:cNvSpPr/>
+          <p:nvPr/>
+        </p:nvSpPr>
+        <p:spPr>
+          <a:xfrm>
+            <a:off x="548640" y="6441377"/>
+            <a:ext cx="11094415" cy="28575"/>
+          </a:xfrm>
+          <a:prstGeom prst="rect">
+            <a:avLst/>
+          </a:prstGeom>
+          <a:solidFill>
+            <a:srgbClr val="111111"/>
+          </a:solidFill>
+          <a:ln>
+            <a:noFill/>
+          </a:ln>
+        </p:spPr>
+        <p:txBody>
+          <a:bodyPr/>
+          <a:lstStyle/>
+          <a:p/>
+        </p:txBody>
+      </p:sp>
       <p:sp>
         <p:nvSpPr>
           <p:cNvPr id="68" name="Google Shape;68;p2"/>
@@ -7026,58 +7041,60 @@
           </a:p>
         </p:txBody>
       </p:sp>
-      <p:cxnSp>
-        <p:nvCxnSpPr>
+      <p:sp>
+        <p:nvSpPr>
           <p:cNvPr id="98" name="Google Shape;98;p3"/>
-          <p:cNvCxnSpPr/>
-          <p:nvPr/>
-        </p:nvCxnSpPr>
-        <p:spPr>
-          <a:xfrm>
-            <a:off x="694944" y="274320"/>
-            <a:ext cx="1" cy="292608"/>
-          </a:xfrm>
-          <a:prstGeom prst="straightConnector1">
-            <a:avLst/>
-          </a:prstGeom>
-          <a:noFill/>
-          <a:ln cap="flat" cmpd="sng" w="25400">
-            <a:solidFill>
-              <a:srgbClr val="111111"/>
-            </a:solidFill>
-            <a:prstDash val="solid"/>
-            <a:round/>
-            <a:headEnd len="sm" w="sm" type="none"/>
-            <a:tailEnd len="sm" w="sm" type="none"/>
-          </a:ln>
-        </p:spPr>
-      </p:cxnSp>
-      <p:cxnSp>
-        <p:nvCxnSpPr>
+          <p:cNvSpPr/>
+          <p:nvPr/>
+        </p:nvSpPr>
+        <p:spPr>
+          <a:xfrm>
+            <a:off x="682244" y="274320"/>
+            <a:ext cx="25400" cy="292608"/>
+          </a:xfrm>
+          <a:prstGeom prst="rect">
+            <a:avLst/>
+          </a:prstGeom>
+          <a:solidFill>
+            <a:srgbClr val="111111"/>
+          </a:solidFill>
+          <a:ln>
+            <a:noFill/>
+          </a:ln>
+        </p:spPr>
+        <p:txBody>
+          <a:bodyPr/>
+          <a:lstStyle/>
+          <a:p/>
+        </p:txBody>
+      </p:sp>
+      <p:sp>
+        <p:nvSpPr>
           <p:cNvPr id="99" name="Google Shape;99;p3"/>
-          <p:cNvCxnSpPr/>
-          <p:nvPr/>
-        </p:nvCxnSpPr>
-        <p:spPr>
-          <a:xfrm>
-            <a:off x="694944" y="420624"/>
-            <a:ext cx="146304" cy="1"/>
-          </a:xfrm>
-          <a:prstGeom prst="straightConnector1">
-            <a:avLst/>
-          </a:prstGeom>
-          <a:noFill/>
-          <a:ln cap="flat" cmpd="sng" w="25400">
-            <a:solidFill>
-              <a:srgbClr val="111111"/>
-            </a:solidFill>
-            <a:prstDash val="solid"/>
-            <a:round/>
-            <a:headEnd len="sm" w="sm" type="none"/>
-            <a:tailEnd len="sm" w="sm" type="none"/>
-          </a:ln>
-        </p:spPr>
-      </p:cxnSp>
+          <p:cNvSpPr/>
+          <p:nvPr/>
+        </p:nvSpPr>
+        <p:spPr>
+          <a:xfrm>
+            <a:off x="694944" y="407924"/>
+            <a:ext cx="146304" cy="25400"/>
+          </a:xfrm>
+          <a:prstGeom prst="rect">
+            <a:avLst/>
+          </a:prstGeom>
+          <a:solidFill>
+            <a:srgbClr val="111111"/>
+          </a:solidFill>
+          <a:ln>
+            <a:noFill/>
+          </a:ln>
+        </p:spPr>
+        <p:txBody>
+          <a:bodyPr/>
+          <a:lstStyle/>
+          <a:p/>
+        </p:txBody>
+      </p:sp>
       <p:sp>
         <p:nvSpPr>
           <p:cNvPr id="100" name="Google Shape;100;p3"/>
@@ -7258,32 +7275,33 @@
           </a:p>
         </p:txBody>
       </p:sp>
-      <p:cxnSp>
-        <p:nvCxnSpPr>
+      <p:sp>
+        <p:nvSpPr>
           <p:cNvPr id="103" name="Google Shape;103;p3"/>
-          <p:cNvCxnSpPr/>
-          <p:nvPr/>
-        </p:nvCxnSpPr>
-        <p:spPr>
-          <a:xfrm>
-            <a:off x="548640" y="6455664"/>
-            <a:ext cx="11094415" cy="1"/>
-          </a:xfrm>
-          <a:prstGeom prst="straightConnector1">
-            <a:avLst/>
-          </a:prstGeom>
-          <a:noFill/>
-          <a:ln cap="flat" cmpd="sng" w="28575">
-            <a:solidFill>
-              <a:srgbClr val="111111"/>
-            </a:solidFill>
-            <a:prstDash val="solid"/>
-            <a:round/>
-            <a:headEnd len="sm" w="sm" type="none"/>
-            <a:tailEnd len="sm" w="sm" type="none"/>
-          </a:ln>
-        </p:spPr>
-      </p:cxnSp>
+          <p:cNvSpPr/>
+          <p:nvPr/>
+        </p:nvSpPr>
+        <p:spPr>
+          <a:xfrm>
+            <a:off x="548640" y="6441377"/>
+            <a:ext cx="11094415" cy="28575"/>
+          </a:xfrm>
+          <a:prstGeom prst="rect">
+            <a:avLst/>
+          </a:prstGeom>
+          <a:solidFill>
+            <a:srgbClr val="111111"/>
+          </a:solidFill>
+          <a:ln>
+            <a:noFill/>
+          </a:ln>
+        </p:spPr>
+        <p:txBody>
+          <a:bodyPr/>
+          <a:lstStyle/>
+          <a:p/>
+        </p:txBody>
+      </p:sp>
       <p:sp>
         <p:nvSpPr>
           <p:cNvPr id="104" name="Google Shape;104;p3"/>
@@ -7719,32 +7737,33 @@
           </a:p>
         </p:txBody>
       </p:sp>
-      <p:cxnSp>
-        <p:nvCxnSpPr>
+      <p:sp>
+        <p:nvSpPr>
           <p:cNvPr id="111" name="Google Shape;111;p3"/>
-          <p:cNvCxnSpPr/>
-          <p:nvPr/>
-        </p:nvCxnSpPr>
-        <p:spPr>
-          <a:xfrm>
-            <a:off x="868680" y="4069080"/>
-            <a:ext cx="3291840" cy="1"/>
-          </a:xfrm>
-          <a:prstGeom prst="straightConnector1">
-            <a:avLst/>
-          </a:prstGeom>
-          <a:noFill/>
-          <a:ln cap="flat" cmpd="sng" w="19050">
-            <a:solidFill>
-              <a:srgbClr val="111111"/>
-            </a:solidFill>
-            <a:prstDash val="solid"/>
-            <a:round/>
-            <a:headEnd len="sm" w="sm" type="none"/>
-            <a:tailEnd len="sm" w="sm" type="none"/>
-          </a:ln>
-        </p:spPr>
-      </p:cxnSp>
+          <p:cNvSpPr/>
+          <p:nvPr/>
+        </p:nvSpPr>
+        <p:spPr>
+          <a:xfrm>
+            <a:off x="868680" y="4059555"/>
+            <a:ext cx="3291840" cy="19050"/>
+          </a:xfrm>
+          <a:prstGeom prst="rect">
+            <a:avLst/>
+          </a:prstGeom>
+          <a:solidFill>
+            <a:srgbClr val="111111"/>
+          </a:solidFill>
+          <a:ln>
+            <a:noFill/>
+          </a:ln>
+        </p:spPr>
+        <p:txBody>
+          <a:bodyPr/>
+          <a:lstStyle/>
+          <a:p/>
+        </p:txBody>
+      </p:sp>
       <p:sp>
         <p:nvSpPr>
           <p:cNvPr id="112" name="Google Shape;112;p3"/>
@@ -7858,58 +7877,60 @@
           </a:p>
         </p:txBody>
       </p:sp>
-      <p:cxnSp>
-        <p:nvCxnSpPr>
+      <p:sp>
+        <p:nvSpPr>
           <p:cNvPr id="114" name="Google Shape;114;p3"/>
-          <p:cNvCxnSpPr/>
-          <p:nvPr/>
-        </p:nvCxnSpPr>
-        <p:spPr>
-          <a:xfrm>
-            <a:off x="1060704" y="5532120"/>
-            <a:ext cx="1" cy="384048"/>
-          </a:xfrm>
-          <a:prstGeom prst="straightConnector1">
-            <a:avLst/>
-          </a:prstGeom>
-          <a:noFill/>
-          <a:ln cap="flat" cmpd="sng" w="25400">
-            <a:solidFill>
-              <a:srgbClr val="111111"/>
-            </a:solidFill>
-            <a:prstDash val="solid"/>
-            <a:round/>
-            <a:headEnd len="sm" w="sm" type="none"/>
-            <a:tailEnd len="sm" w="sm" type="none"/>
-          </a:ln>
-        </p:spPr>
-      </p:cxnSp>
-      <p:cxnSp>
-        <p:nvCxnSpPr>
+          <p:cNvSpPr/>
+          <p:nvPr/>
+        </p:nvSpPr>
+        <p:spPr>
+          <a:xfrm>
+            <a:off x="1048004" y="5532120"/>
+            <a:ext cx="25400" cy="384048"/>
+          </a:xfrm>
+          <a:prstGeom prst="rect">
+            <a:avLst/>
+          </a:prstGeom>
+          <a:solidFill>
+            <a:srgbClr val="111111"/>
+          </a:solidFill>
+          <a:ln>
+            <a:noFill/>
+          </a:ln>
+        </p:spPr>
+        <p:txBody>
+          <a:bodyPr/>
+          <a:lstStyle/>
+          <a:p/>
+        </p:txBody>
+      </p:sp>
+      <p:sp>
+        <p:nvSpPr>
           <p:cNvPr id="115" name="Google Shape;115;p3"/>
-          <p:cNvCxnSpPr/>
-          <p:nvPr/>
-        </p:nvCxnSpPr>
-        <p:spPr>
-          <a:xfrm>
-            <a:off x="1060704" y="5724144"/>
-            <a:ext cx="192024" cy="1"/>
-          </a:xfrm>
-          <a:prstGeom prst="straightConnector1">
-            <a:avLst/>
-          </a:prstGeom>
-          <a:noFill/>
-          <a:ln cap="flat" cmpd="sng" w="25400">
-            <a:solidFill>
-              <a:srgbClr val="111111"/>
-            </a:solidFill>
-            <a:prstDash val="solid"/>
-            <a:round/>
-            <a:headEnd len="sm" w="sm" type="none"/>
-            <a:tailEnd len="sm" w="sm" type="none"/>
-          </a:ln>
-        </p:spPr>
-      </p:cxnSp>
+          <p:cNvSpPr/>
+          <p:nvPr/>
+        </p:nvSpPr>
+        <p:spPr>
+          <a:xfrm>
+            <a:off x="1060704" y="5711444"/>
+            <a:ext cx="192024" cy="25400"/>
+          </a:xfrm>
+          <a:prstGeom prst="rect">
+            <a:avLst/>
+          </a:prstGeom>
+          <a:solidFill>
+            <a:srgbClr val="111111"/>
+          </a:solidFill>
+          <a:ln>
+            <a:noFill/>
+          </a:ln>
+        </p:spPr>
+        <p:txBody>
+          <a:bodyPr/>
+          <a:lstStyle/>
+          <a:p/>
+        </p:txBody>
+      </p:sp>
       <p:sp>
         <p:nvSpPr>
           <p:cNvPr id="116" name="Google Shape;116;p3"/>
@@ -8865,58 +8886,60 @@
           </a:p>
         </p:txBody>
       </p:sp>
-      <p:cxnSp>
-        <p:nvCxnSpPr>
+      <p:sp>
+        <p:nvSpPr>
           <p:cNvPr id="137" name="Google Shape;137;p4"/>
-          <p:cNvCxnSpPr/>
-          <p:nvPr/>
-        </p:nvCxnSpPr>
-        <p:spPr>
-          <a:xfrm>
-            <a:off x="694944" y="274320"/>
-            <a:ext cx="1" cy="292608"/>
-          </a:xfrm>
-          <a:prstGeom prst="straightConnector1">
-            <a:avLst/>
-          </a:prstGeom>
-          <a:noFill/>
-          <a:ln cap="flat" cmpd="sng" w="25400">
-            <a:solidFill>
-              <a:srgbClr val="111111"/>
-            </a:solidFill>
-            <a:prstDash val="solid"/>
-            <a:round/>
-            <a:headEnd len="sm" w="sm" type="none"/>
-            <a:tailEnd len="sm" w="sm" type="none"/>
-          </a:ln>
-        </p:spPr>
-      </p:cxnSp>
-      <p:cxnSp>
-        <p:nvCxnSpPr>
+          <p:cNvSpPr/>
+          <p:nvPr/>
+        </p:nvSpPr>
+        <p:spPr>
+          <a:xfrm>
+            <a:off x="682244" y="274320"/>
+            <a:ext cx="25400" cy="292608"/>
+          </a:xfrm>
+          <a:prstGeom prst="rect">
+            <a:avLst/>
+          </a:prstGeom>
+          <a:solidFill>
+            <a:srgbClr val="111111"/>
+          </a:solidFill>
+          <a:ln>
+            <a:noFill/>
+          </a:ln>
+        </p:spPr>
+        <p:txBody>
+          <a:bodyPr/>
+          <a:lstStyle/>
+          <a:p/>
+        </p:txBody>
+      </p:sp>
+      <p:sp>
+        <p:nvSpPr>
           <p:cNvPr id="138" name="Google Shape;138;p4"/>
-          <p:cNvCxnSpPr/>
-          <p:nvPr/>
-        </p:nvCxnSpPr>
-        <p:spPr>
-          <a:xfrm>
-            <a:off x="694944" y="420624"/>
-            <a:ext cx="146304" cy="1"/>
-          </a:xfrm>
-          <a:prstGeom prst="straightConnector1">
-            <a:avLst/>
-          </a:prstGeom>
-          <a:noFill/>
-          <a:ln cap="flat" cmpd="sng" w="25400">
-            <a:solidFill>
-              <a:srgbClr val="111111"/>
-            </a:solidFill>
-            <a:prstDash val="solid"/>
-            <a:round/>
-            <a:headEnd len="sm" w="sm" type="none"/>
-            <a:tailEnd len="sm" w="sm" type="none"/>
-          </a:ln>
-        </p:spPr>
-      </p:cxnSp>
+          <p:cNvSpPr/>
+          <p:nvPr/>
+        </p:nvSpPr>
+        <p:spPr>
+          <a:xfrm>
+            <a:off x="694944" y="407924"/>
+            <a:ext cx="146304" cy="25400"/>
+          </a:xfrm>
+          <a:prstGeom prst="rect">
+            <a:avLst/>
+          </a:prstGeom>
+          <a:solidFill>
+            <a:srgbClr val="111111"/>
+          </a:solidFill>
+          <a:ln>
+            <a:noFill/>
+          </a:ln>
+        </p:spPr>
+        <p:txBody>
+          <a:bodyPr/>
+          <a:lstStyle/>
+          <a:p/>
+        </p:txBody>
+      </p:sp>
       <p:sp>
         <p:nvSpPr>
           <p:cNvPr id="139" name="Google Shape;139;p4"/>
@@ -9097,32 +9120,33 @@
           </a:p>
         </p:txBody>
       </p:sp>
-      <p:cxnSp>
-        <p:nvCxnSpPr>
+      <p:sp>
+        <p:nvSpPr>
           <p:cNvPr id="142" name="Google Shape;142;p4"/>
-          <p:cNvCxnSpPr/>
-          <p:nvPr/>
-        </p:nvCxnSpPr>
-        <p:spPr>
-          <a:xfrm>
-            <a:off x="548640" y="6455664"/>
-            <a:ext cx="11094415" cy="1"/>
-          </a:xfrm>
-          <a:prstGeom prst="straightConnector1">
-            <a:avLst/>
-          </a:prstGeom>
-          <a:noFill/>
-          <a:ln cap="flat" cmpd="sng" w="28575">
-            <a:solidFill>
-              <a:srgbClr val="111111"/>
-            </a:solidFill>
-            <a:prstDash val="solid"/>
-            <a:round/>
-            <a:headEnd len="sm" w="sm" type="none"/>
-            <a:tailEnd len="sm" w="sm" type="none"/>
-          </a:ln>
-        </p:spPr>
-      </p:cxnSp>
+          <p:cNvSpPr/>
+          <p:nvPr/>
+        </p:nvSpPr>
+        <p:spPr>
+          <a:xfrm>
+            <a:off x="548640" y="6441377"/>
+            <a:ext cx="11094415" cy="28575"/>
+          </a:xfrm>
+          <a:prstGeom prst="rect">
+            <a:avLst/>
+          </a:prstGeom>
+          <a:solidFill>
+            <a:srgbClr val="111111"/>
+          </a:solidFill>
+          <a:ln>
+            <a:noFill/>
+          </a:ln>
+        </p:spPr>
+        <p:txBody>
+          <a:bodyPr/>
+          <a:lstStyle/>
+          <a:p/>
+        </p:txBody>
+      </p:sp>
       <p:sp>
         <p:nvSpPr>
           <p:cNvPr id="143" name="Google Shape;143;p4"/>
@@ -9609,32 +9633,33 @@
           </a:p>
         </p:txBody>
       </p:sp>
-      <p:cxnSp>
-        <p:nvCxnSpPr>
+      <p:sp>
+        <p:nvSpPr>
           <p:cNvPr id="151" name="Google Shape;151;p4"/>
-          <p:cNvCxnSpPr/>
-          <p:nvPr/>
-        </p:nvCxnSpPr>
-        <p:spPr>
-          <a:xfrm>
-            <a:off x="2848356" y="2825496"/>
-            <a:ext cx="237744" cy="1"/>
-          </a:xfrm>
-          <a:prstGeom prst="straightConnector1">
-            <a:avLst/>
-          </a:prstGeom>
-          <a:noFill/>
-          <a:ln cap="flat" cmpd="sng" w="31750">
-            <a:solidFill>
-              <a:srgbClr val="111111"/>
-            </a:solidFill>
-            <a:prstDash val="solid"/>
-            <a:round/>
-            <a:headEnd len="sm" w="sm" type="none"/>
-            <a:tailEnd len="med" w="med" type="triangle"/>
-          </a:ln>
-        </p:spPr>
-      </p:cxnSp>
+          <p:cNvSpPr/>
+          <p:nvPr/>
+        </p:nvSpPr>
+        <p:spPr>
+          <a:xfrm>
+            <a:off x="2848356" y="2809621"/>
+            <a:ext cx="237744" cy="31750"/>
+          </a:xfrm>
+          <a:prstGeom prst="rect">
+            <a:avLst/>
+          </a:prstGeom>
+          <a:solidFill>
+            <a:srgbClr val="111111"/>
+          </a:solidFill>
+          <a:ln>
+            <a:noFill/>
+          </a:ln>
+        </p:spPr>
+        <p:txBody>
+          <a:bodyPr/>
+          <a:lstStyle/>
+          <a:p/>
+        </p:txBody>
+      </p:sp>
       <p:sp>
         <p:nvSpPr>
           <p:cNvPr id="152" name="Google Shape;152;p4"/>
@@ -9752,32 +9777,33 @@
           </a:p>
         </p:txBody>
       </p:sp>
-      <p:cxnSp>
-        <p:nvCxnSpPr>
+      <p:sp>
+        <p:nvSpPr>
           <p:cNvPr id="154" name="Google Shape;154;p4"/>
-          <p:cNvCxnSpPr/>
-          <p:nvPr/>
-        </p:nvCxnSpPr>
-        <p:spPr>
-          <a:xfrm>
-            <a:off x="4613148" y="2825496"/>
-            <a:ext cx="237744" cy="1"/>
-          </a:xfrm>
-          <a:prstGeom prst="straightConnector1">
-            <a:avLst/>
-          </a:prstGeom>
-          <a:noFill/>
-          <a:ln cap="flat" cmpd="sng" w="31750">
-            <a:solidFill>
-              <a:srgbClr val="111111"/>
-            </a:solidFill>
-            <a:prstDash val="solid"/>
-            <a:round/>
-            <a:headEnd len="sm" w="sm" type="none"/>
-            <a:tailEnd len="med" w="med" type="triangle"/>
-          </a:ln>
-        </p:spPr>
-      </p:cxnSp>
+          <p:cNvSpPr/>
+          <p:nvPr/>
+        </p:nvSpPr>
+        <p:spPr>
+          <a:xfrm>
+            <a:off x="4613148" y="2809621"/>
+            <a:ext cx="237744" cy="31750"/>
+          </a:xfrm>
+          <a:prstGeom prst="rect">
+            <a:avLst/>
+          </a:prstGeom>
+          <a:solidFill>
+            <a:srgbClr val="111111"/>
+          </a:solidFill>
+          <a:ln>
+            <a:noFill/>
+          </a:ln>
+        </p:spPr>
+        <p:txBody>
+          <a:bodyPr/>
+          <a:lstStyle/>
+          <a:p/>
+        </p:txBody>
+      </p:sp>
       <p:sp>
         <p:nvSpPr>
           <p:cNvPr id="155" name="Google Shape;155;p4"/>
@@ -9895,32 +9921,33 @@
           </a:p>
         </p:txBody>
       </p:sp>
-      <p:cxnSp>
-        <p:nvCxnSpPr>
+      <p:sp>
+        <p:nvSpPr>
           <p:cNvPr id="157" name="Google Shape;157;p4"/>
-          <p:cNvCxnSpPr/>
-          <p:nvPr/>
-        </p:nvCxnSpPr>
-        <p:spPr>
-          <a:xfrm>
-            <a:off x="6743700" y="2825496"/>
-            <a:ext cx="237744" cy="1"/>
-          </a:xfrm>
-          <a:prstGeom prst="straightConnector1">
-            <a:avLst/>
-          </a:prstGeom>
-          <a:noFill/>
-          <a:ln cap="flat" cmpd="sng" w="31750">
-            <a:solidFill>
-              <a:srgbClr val="111111"/>
-            </a:solidFill>
-            <a:prstDash val="solid"/>
-            <a:round/>
-            <a:headEnd len="sm" w="sm" type="none"/>
-            <a:tailEnd len="med" w="med" type="triangle"/>
-          </a:ln>
-        </p:spPr>
-      </p:cxnSp>
+          <p:cNvSpPr/>
+          <p:nvPr/>
+        </p:nvSpPr>
+        <p:spPr>
+          <a:xfrm>
+            <a:off x="6743700" y="2809621"/>
+            <a:ext cx="237744" cy="31750"/>
+          </a:xfrm>
+          <a:prstGeom prst="rect">
+            <a:avLst/>
+          </a:prstGeom>
+          <a:solidFill>
+            <a:srgbClr val="111111"/>
+          </a:solidFill>
+          <a:ln>
+            <a:noFill/>
+          </a:ln>
+        </p:spPr>
+        <p:txBody>
+          <a:bodyPr/>
+          <a:lstStyle/>
+          <a:p/>
+        </p:txBody>
+      </p:sp>
       <p:sp>
         <p:nvSpPr>
           <p:cNvPr id="158" name="Google Shape;158;p4"/>
@@ -10038,32 +10065,33 @@
           </a:p>
         </p:txBody>
       </p:sp>
-      <p:cxnSp>
-        <p:nvCxnSpPr>
+      <p:sp>
+        <p:nvSpPr>
           <p:cNvPr id="160" name="Google Shape;160;p4"/>
-          <p:cNvCxnSpPr/>
-          <p:nvPr/>
-        </p:nvCxnSpPr>
-        <p:spPr>
-          <a:xfrm>
-            <a:off x="9422892" y="2825496"/>
-            <a:ext cx="237744" cy="1"/>
-          </a:xfrm>
-          <a:prstGeom prst="straightConnector1">
-            <a:avLst/>
-          </a:prstGeom>
-          <a:noFill/>
-          <a:ln cap="flat" cmpd="sng" w="31750">
-            <a:solidFill>
-              <a:srgbClr val="111111"/>
-            </a:solidFill>
-            <a:prstDash val="solid"/>
-            <a:round/>
-            <a:headEnd len="sm" w="sm" type="none"/>
-            <a:tailEnd len="med" w="med" type="triangle"/>
-          </a:ln>
-        </p:spPr>
-      </p:cxnSp>
+          <p:cNvSpPr/>
+          <p:nvPr/>
+        </p:nvSpPr>
+        <p:spPr>
+          <a:xfrm>
+            <a:off x="9422892" y="2809621"/>
+            <a:ext cx="237744" cy="31750"/>
+          </a:xfrm>
+          <a:prstGeom prst="rect">
+            <a:avLst/>
+          </a:prstGeom>
+          <a:solidFill>
+            <a:srgbClr val="111111"/>
+          </a:solidFill>
+          <a:ln>
+            <a:noFill/>
+          </a:ln>
+        </p:spPr>
+        <p:txBody>
+          <a:bodyPr/>
+          <a:lstStyle/>
+          <a:p/>
+        </p:txBody>
+      </p:sp>
       <p:sp>
         <p:nvSpPr>
           <p:cNvPr id="161" name="Google Shape;161;p4"/>
@@ -11208,58 +11236,60 @@
           </a:p>
         </p:txBody>
       </p:sp>
-      <p:cxnSp>
-        <p:nvCxnSpPr>
+      <p:sp>
+        <p:nvSpPr>
           <p:cNvPr id="185" name="Google Shape;185;p5"/>
-          <p:cNvCxnSpPr/>
-          <p:nvPr/>
-        </p:nvCxnSpPr>
-        <p:spPr>
-          <a:xfrm>
-            <a:off x="694944" y="274320"/>
-            <a:ext cx="1" cy="292608"/>
-          </a:xfrm>
-          <a:prstGeom prst="straightConnector1">
-            <a:avLst/>
-          </a:prstGeom>
-          <a:noFill/>
-          <a:ln cap="flat" cmpd="sng" w="25400">
-            <a:solidFill>
-              <a:srgbClr val="111111"/>
-            </a:solidFill>
-            <a:prstDash val="solid"/>
-            <a:round/>
-            <a:headEnd len="sm" w="sm" type="none"/>
-            <a:tailEnd len="sm" w="sm" type="none"/>
-          </a:ln>
-        </p:spPr>
-      </p:cxnSp>
-      <p:cxnSp>
-        <p:nvCxnSpPr>
+          <p:cNvSpPr/>
+          <p:nvPr/>
+        </p:nvSpPr>
+        <p:spPr>
+          <a:xfrm>
+            <a:off x="682244" y="274320"/>
+            <a:ext cx="25400" cy="292608"/>
+          </a:xfrm>
+          <a:prstGeom prst="rect">
+            <a:avLst/>
+          </a:prstGeom>
+          <a:solidFill>
+            <a:srgbClr val="111111"/>
+          </a:solidFill>
+          <a:ln>
+            <a:noFill/>
+          </a:ln>
+        </p:spPr>
+        <p:txBody>
+          <a:bodyPr/>
+          <a:lstStyle/>
+          <a:p/>
+        </p:txBody>
+      </p:sp>
+      <p:sp>
+        <p:nvSpPr>
           <p:cNvPr id="186" name="Google Shape;186;p5"/>
-          <p:cNvCxnSpPr/>
-          <p:nvPr/>
-        </p:nvCxnSpPr>
-        <p:spPr>
-          <a:xfrm>
-            <a:off x="694944" y="420624"/>
-            <a:ext cx="146304" cy="1"/>
-          </a:xfrm>
-          <a:prstGeom prst="straightConnector1">
-            <a:avLst/>
-          </a:prstGeom>
-          <a:noFill/>
-          <a:ln cap="flat" cmpd="sng" w="25400">
-            <a:solidFill>
-              <a:srgbClr val="111111"/>
-            </a:solidFill>
-            <a:prstDash val="solid"/>
-            <a:round/>
-            <a:headEnd len="sm" w="sm" type="none"/>
-            <a:tailEnd len="sm" w="sm" type="none"/>
-          </a:ln>
-        </p:spPr>
-      </p:cxnSp>
+          <p:cNvSpPr/>
+          <p:nvPr/>
+        </p:nvSpPr>
+        <p:spPr>
+          <a:xfrm>
+            <a:off x="694944" y="407924"/>
+            <a:ext cx="146304" cy="25400"/>
+          </a:xfrm>
+          <a:prstGeom prst="rect">
+            <a:avLst/>
+          </a:prstGeom>
+          <a:solidFill>
+            <a:srgbClr val="111111"/>
+          </a:solidFill>
+          <a:ln>
+            <a:noFill/>
+          </a:ln>
+        </p:spPr>
+        <p:txBody>
+          <a:bodyPr/>
+          <a:lstStyle/>
+          <a:p/>
+        </p:txBody>
+      </p:sp>
       <p:sp>
         <p:nvSpPr>
           <p:cNvPr id="187" name="Google Shape;187;p5"/>
@@ -11440,32 +11470,33 @@
           </a:p>
         </p:txBody>
       </p:sp>
-      <p:cxnSp>
-        <p:nvCxnSpPr>
+      <p:sp>
+        <p:nvSpPr>
           <p:cNvPr id="190" name="Google Shape;190;p5"/>
-          <p:cNvCxnSpPr/>
-          <p:nvPr/>
-        </p:nvCxnSpPr>
-        <p:spPr>
-          <a:xfrm>
-            <a:off x="548640" y="6455664"/>
-            <a:ext cx="11094415" cy="1"/>
-          </a:xfrm>
-          <a:prstGeom prst="straightConnector1">
-            <a:avLst/>
-          </a:prstGeom>
-          <a:noFill/>
-          <a:ln cap="flat" cmpd="sng" w="28575">
-            <a:solidFill>
-              <a:srgbClr val="111111"/>
-            </a:solidFill>
-            <a:prstDash val="solid"/>
-            <a:round/>
-            <a:headEnd len="sm" w="sm" type="none"/>
-            <a:tailEnd len="sm" w="sm" type="none"/>
-          </a:ln>
-        </p:spPr>
-      </p:cxnSp>
+          <p:cNvSpPr/>
+          <p:nvPr/>
+        </p:nvSpPr>
+        <p:spPr>
+          <a:xfrm>
+            <a:off x="548640" y="6441377"/>
+            <a:ext cx="11094415" cy="28575"/>
+          </a:xfrm>
+          <a:prstGeom prst="rect">
+            <a:avLst/>
+          </a:prstGeom>
+          <a:solidFill>
+            <a:srgbClr val="111111"/>
+          </a:solidFill>
+          <a:ln>
+            <a:noFill/>
+          </a:ln>
+        </p:spPr>
+        <p:txBody>
+          <a:bodyPr/>
+          <a:lstStyle/>
+          <a:p/>
+        </p:txBody>
+      </p:sp>
       <p:sp>
         <p:nvSpPr>
           <p:cNvPr id="191" name="Google Shape;191;p5"/>
@@ -13061,58 +13092,60 @@
           </a:p>
         </p:txBody>
       </p:sp>
-      <p:cxnSp>
-        <p:nvCxnSpPr>
+      <p:sp>
+        <p:nvSpPr>
           <p:cNvPr id="222" name="Google Shape;222;p6"/>
-          <p:cNvCxnSpPr/>
-          <p:nvPr/>
-        </p:nvCxnSpPr>
-        <p:spPr>
-          <a:xfrm>
-            <a:off x="694944" y="274320"/>
-            <a:ext cx="1" cy="292608"/>
-          </a:xfrm>
-          <a:prstGeom prst="straightConnector1">
-            <a:avLst/>
-          </a:prstGeom>
-          <a:noFill/>
-          <a:ln cap="flat" cmpd="sng" w="25400">
-            <a:solidFill>
-              <a:srgbClr val="FAF4E8"/>
-            </a:solidFill>
-            <a:prstDash val="solid"/>
-            <a:round/>
-            <a:headEnd len="sm" w="sm" type="none"/>
-            <a:tailEnd len="sm" w="sm" type="none"/>
-          </a:ln>
-        </p:spPr>
-      </p:cxnSp>
-      <p:cxnSp>
-        <p:nvCxnSpPr>
+          <p:cNvSpPr/>
+          <p:nvPr/>
+        </p:nvSpPr>
+        <p:spPr>
+          <a:xfrm>
+            <a:off x="682244" y="274320"/>
+            <a:ext cx="25400" cy="292608"/>
+          </a:xfrm>
+          <a:prstGeom prst="rect">
+            <a:avLst/>
+          </a:prstGeom>
+          <a:solidFill>
+            <a:srgbClr val="FAF4E8"/>
+          </a:solidFill>
+          <a:ln>
+            <a:noFill/>
+          </a:ln>
+        </p:spPr>
+        <p:txBody>
+          <a:bodyPr/>
+          <a:lstStyle/>
+          <a:p/>
+        </p:txBody>
+      </p:sp>
+      <p:sp>
+        <p:nvSpPr>
           <p:cNvPr id="223" name="Google Shape;223;p6"/>
-          <p:cNvCxnSpPr/>
-          <p:nvPr/>
-        </p:nvCxnSpPr>
-        <p:spPr>
-          <a:xfrm>
-            <a:off x="694944" y="420624"/>
-            <a:ext cx="146304" cy="1"/>
-          </a:xfrm>
-          <a:prstGeom prst="straightConnector1">
-            <a:avLst/>
-          </a:prstGeom>
-          <a:noFill/>
-          <a:ln cap="flat" cmpd="sng" w="25400">
-            <a:solidFill>
-              <a:srgbClr val="FAF4E8"/>
-            </a:solidFill>
-            <a:prstDash val="solid"/>
-            <a:round/>
-            <a:headEnd len="sm" w="sm" type="none"/>
-            <a:tailEnd len="sm" w="sm" type="none"/>
-          </a:ln>
-        </p:spPr>
-      </p:cxnSp>
+          <p:cNvSpPr/>
+          <p:nvPr/>
+        </p:nvSpPr>
+        <p:spPr>
+          <a:xfrm>
+            <a:off x="694944" y="407924"/>
+            <a:ext cx="146304" cy="25400"/>
+          </a:xfrm>
+          <a:prstGeom prst="rect">
+            <a:avLst/>
+          </a:prstGeom>
+          <a:solidFill>
+            <a:srgbClr val="FAF4E8"/>
+          </a:solidFill>
+          <a:ln>
+            <a:noFill/>
+          </a:ln>
+        </p:spPr>
+        <p:txBody>
+          <a:bodyPr/>
+          <a:lstStyle/>
+          <a:p/>
+        </p:txBody>
+      </p:sp>
       <p:sp>
         <p:nvSpPr>
           <p:cNvPr id="224" name="Google Shape;224;p6"/>
@@ -13293,32 +13326,33 @@
           </a:p>
         </p:txBody>
       </p:sp>
-      <p:cxnSp>
-        <p:nvCxnSpPr>
+      <p:sp>
+        <p:nvSpPr>
           <p:cNvPr id="227" name="Google Shape;227;p6"/>
-          <p:cNvCxnSpPr/>
-          <p:nvPr/>
-        </p:nvCxnSpPr>
-        <p:spPr>
-          <a:xfrm>
-            <a:off x="548640" y="6455664"/>
-            <a:ext cx="11094415" cy="1"/>
-          </a:xfrm>
-          <a:prstGeom prst="straightConnector1">
-            <a:avLst/>
-          </a:prstGeom>
-          <a:noFill/>
-          <a:ln cap="flat" cmpd="sng" w="28575">
-            <a:solidFill>
-              <a:srgbClr val="FAF4E8"/>
-            </a:solidFill>
-            <a:prstDash val="solid"/>
-            <a:round/>
-            <a:headEnd len="sm" w="sm" type="none"/>
-            <a:tailEnd len="sm" w="sm" type="none"/>
-          </a:ln>
-        </p:spPr>
-      </p:cxnSp>
+          <p:cNvSpPr/>
+          <p:nvPr/>
+        </p:nvSpPr>
+        <p:spPr>
+          <a:xfrm>
+            <a:off x="548640" y="6441377"/>
+            <a:ext cx="11094415" cy="28575"/>
+          </a:xfrm>
+          <a:prstGeom prst="rect">
+            <a:avLst/>
+          </a:prstGeom>
+          <a:solidFill>
+            <a:srgbClr val="FAF4E8"/>
+          </a:solidFill>
+          <a:ln>
+            <a:noFill/>
+          </a:ln>
+        </p:spPr>
+        <p:txBody>
+          <a:bodyPr/>
+          <a:lstStyle/>
+          <a:p/>
+        </p:txBody>
+      </p:sp>
       <p:sp>
         <p:nvSpPr>
           <p:cNvPr id="228" name="Google Shape;228;p6"/>
@@ -15124,58 +15158,60 @@
           </a:p>
         </p:txBody>
       </p:sp>
-      <p:cxnSp>
-        <p:nvCxnSpPr>
+      <p:sp>
+        <p:nvSpPr>
           <p:cNvPr id="263" name="Google Shape;263;p7"/>
-          <p:cNvCxnSpPr/>
-          <p:nvPr/>
-        </p:nvCxnSpPr>
-        <p:spPr>
-          <a:xfrm>
-            <a:off x="694944" y="274320"/>
-            <a:ext cx="1" cy="292608"/>
-          </a:xfrm>
-          <a:prstGeom prst="straightConnector1">
-            <a:avLst/>
-          </a:prstGeom>
-          <a:noFill/>
-          <a:ln cap="flat" cmpd="sng" w="25400">
-            <a:solidFill>
-              <a:srgbClr val="111111"/>
-            </a:solidFill>
-            <a:prstDash val="solid"/>
-            <a:round/>
-            <a:headEnd len="sm" w="sm" type="none"/>
-            <a:tailEnd len="sm" w="sm" type="none"/>
-          </a:ln>
-        </p:spPr>
-      </p:cxnSp>
-      <p:cxnSp>
-        <p:nvCxnSpPr>
+          <p:cNvSpPr/>
+          <p:nvPr/>
+        </p:nvSpPr>
+        <p:spPr>
+          <a:xfrm>
+            <a:off x="682244" y="274320"/>
+            <a:ext cx="25400" cy="292608"/>
+          </a:xfrm>
+          <a:prstGeom prst="rect">
+            <a:avLst/>
+          </a:prstGeom>
+          <a:solidFill>
+            <a:srgbClr val="111111"/>
+          </a:solidFill>
+          <a:ln>
+            <a:noFill/>
+          </a:ln>
+        </p:spPr>
+        <p:txBody>
+          <a:bodyPr/>
+          <a:lstStyle/>
+          <a:p/>
+        </p:txBody>
+      </p:sp>
+      <p:sp>
+        <p:nvSpPr>
           <p:cNvPr id="264" name="Google Shape;264;p7"/>
-          <p:cNvCxnSpPr/>
-          <p:nvPr/>
-        </p:nvCxnSpPr>
-        <p:spPr>
-          <a:xfrm>
-            <a:off x="694944" y="420624"/>
-            <a:ext cx="146304" cy="1"/>
-          </a:xfrm>
-          <a:prstGeom prst="straightConnector1">
-            <a:avLst/>
-          </a:prstGeom>
-          <a:noFill/>
-          <a:ln cap="flat" cmpd="sng" w="25400">
-            <a:solidFill>
-              <a:srgbClr val="111111"/>
-            </a:solidFill>
-            <a:prstDash val="solid"/>
-            <a:round/>
-            <a:headEnd len="sm" w="sm" type="none"/>
-            <a:tailEnd len="sm" w="sm" type="none"/>
-          </a:ln>
-        </p:spPr>
-      </p:cxnSp>
+          <p:cNvSpPr/>
+          <p:nvPr/>
+        </p:nvSpPr>
+        <p:spPr>
+          <a:xfrm>
+            <a:off x="694944" y="407924"/>
+            <a:ext cx="146304" cy="25400"/>
+          </a:xfrm>
+          <a:prstGeom prst="rect">
+            <a:avLst/>
+          </a:prstGeom>
+          <a:solidFill>
+            <a:srgbClr val="111111"/>
+          </a:solidFill>
+          <a:ln>
+            <a:noFill/>
+          </a:ln>
+        </p:spPr>
+        <p:txBody>
+          <a:bodyPr/>
+          <a:lstStyle/>
+          <a:p/>
+        </p:txBody>
+      </p:sp>
       <p:sp>
         <p:nvSpPr>
           <p:cNvPr id="265" name="Google Shape;265;p7"/>
@@ -15356,32 +15392,33 @@
           </a:p>
         </p:txBody>
       </p:sp>
-      <p:cxnSp>
-        <p:nvCxnSpPr>
+      <p:sp>
+        <p:nvSpPr>
           <p:cNvPr id="268" name="Google Shape;268;p7"/>
-          <p:cNvCxnSpPr/>
-          <p:nvPr/>
-        </p:nvCxnSpPr>
-        <p:spPr>
-          <a:xfrm>
-            <a:off x="548640" y="6455664"/>
-            <a:ext cx="11094415" cy="1"/>
-          </a:xfrm>
-          <a:prstGeom prst="straightConnector1">
-            <a:avLst/>
-          </a:prstGeom>
-          <a:noFill/>
-          <a:ln cap="flat" cmpd="sng" w="28575">
-            <a:solidFill>
-              <a:srgbClr val="111111"/>
-            </a:solidFill>
-            <a:prstDash val="solid"/>
-            <a:round/>
-            <a:headEnd len="sm" w="sm" type="none"/>
-            <a:tailEnd len="sm" w="sm" type="none"/>
-          </a:ln>
-        </p:spPr>
-      </p:cxnSp>
+          <p:cNvSpPr/>
+          <p:nvPr/>
+        </p:nvSpPr>
+        <p:spPr>
+          <a:xfrm>
+            <a:off x="548640" y="6441377"/>
+            <a:ext cx="11094415" cy="28575"/>
+          </a:xfrm>
+          <a:prstGeom prst="rect">
+            <a:avLst/>
+          </a:prstGeom>
+          <a:solidFill>
+            <a:srgbClr val="111111"/>
+          </a:solidFill>
+          <a:ln>
+            <a:noFill/>
+          </a:ln>
+        </p:spPr>
+        <p:txBody>
+          <a:bodyPr/>
+          <a:lstStyle/>
+          <a:p/>
+        </p:txBody>
+      </p:sp>
       <p:sp>
         <p:nvSpPr>
           <p:cNvPr id="269" name="Google Shape;269;p7"/>
@@ -18289,58 +18326,60 @@
           </a:p>
         </p:txBody>
       </p:sp>
-      <p:cxnSp>
-        <p:nvCxnSpPr>
+      <p:sp>
+        <p:nvSpPr>
           <p:cNvPr id="282" name="Google Shape;282;p8"/>
-          <p:cNvCxnSpPr/>
-          <p:nvPr/>
-        </p:nvCxnSpPr>
-        <p:spPr>
-          <a:xfrm>
-            <a:off x="694944" y="274320"/>
-            <a:ext cx="1" cy="292608"/>
-          </a:xfrm>
-          <a:prstGeom prst="straightConnector1">
-            <a:avLst/>
-          </a:prstGeom>
-          <a:noFill/>
-          <a:ln cap="flat" cmpd="sng" w="25400">
-            <a:solidFill>
-              <a:srgbClr val="111111"/>
-            </a:solidFill>
-            <a:prstDash val="solid"/>
-            <a:round/>
-            <a:headEnd len="sm" w="sm" type="none"/>
-            <a:tailEnd len="sm" w="sm" type="none"/>
-          </a:ln>
-        </p:spPr>
-      </p:cxnSp>
-      <p:cxnSp>
-        <p:nvCxnSpPr>
+          <p:cNvSpPr/>
+          <p:nvPr/>
+        </p:nvSpPr>
+        <p:spPr>
+          <a:xfrm>
+            <a:off x="682244" y="274320"/>
+            <a:ext cx="25400" cy="292608"/>
+          </a:xfrm>
+          <a:prstGeom prst="rect">
+            <a:avLst/>
+          </a:prstGeom>
+          <a:solidFill>
+            <a:srgbClr val="111111"/>
+          </a:solidFill>
+          <a:ln>
+            <a:noFill/>
+          </a:ln>
+        </p:spPr>
+        <p:txBody>
+          <a:bodyPr/>
+          <a:lstStyle/>
+          <a:p/>
+        </p:txBody>
+      </p:sp>
+      <p:sp>
+        <p:nvSpPr>
           <p:cNvPr id="283" name="Google Shape;283;p8"/>
-          <p:cNvCxnSpPr/>
-          <p:nvPr/>
-        </p:nvCxnSpPr>
-        <p:spPr>
-          <a:xfrm>
-            <a:off x="694944" y="420624"/>
-            <a:ext cx="146304" cy="1"/>
-          </a:xfrm>
-          <a:prstGeom prst="straightConnector1">
-            <a:avLst/>
-          </a:prstGeom>
-          <a:noFill/>
-          <a:ln cap="flat" cmpd="sng" w="25400">
-            <a:solidFill>
-              <a:srgbClr val="111111"/>
-            </a:solidFill>
-            <a:prstDash val="solid"/>
-            <a:round/>
-            <a:headEnd len="sm" w="sm" type="none"/>
-            <a:tailEnd len="sm" w="sm" type="none"/>
-          </a:ln>
-        </p:spPr>
-      </p:cxnSp>
+          <p:cNvSpPr/>
+          <p:nvPr/>
+        </p:nvSpPr>
+        <p:spPr>
+          <a:xfrm>
+            <a:off x="694944" y="407924"/>
+            <a:ext cx="146304" cy="25400"/>
+          </a:xfrm>
+          <a:prstGeom prst="rect">
+            <a:avLst/>
+          </a:prstGeom>
+          <a:solidFill>
+            <a:srgbClr val="111111"/>
+          </a:solidFill>
+          <a:ln>
+            <a:noFill/>
+          </a:ln>
+        </p:spPr>
+        <p:txBody>
+          <a:bodyPr/>
+          <a:lstStyle/>
+          <a:p/>
+        </p:txBody>
+      </p:sp>
       <p:sp>
         <p:nvSpPr>
           <p:cNvPr id="284" name="Google Shape;284;p8"/>
@@ -18521,32 +18560,33 @@
           </a:p>
         </p:txBody>
       </p:sp>
-      <p:cxnSp>
-        <p:nvCxnSpPr>
+      <p:sp>
+        <p:nvSpPr>
           <p:cNvPr id="287" name="Google Shape;287;p8"/>
-          <p:cNvCxnSpPr/>
-          <p:nvPr/>
-        </p:nvCxnSpPr>
-        <p:spPr>
-          <a:xfrm>
-            <a:off x="548640" y="6455664"/>
-            <a:ext cx="11094415" cy="1"/>
-          </a:xfrm>
-          <a:prstGeom prst="straightConnector1">
-            <a:avLst/>
-          </a:prstGeom>
-          <a:noFill/>
-          <a:ln cap="flat" cmpd="sng" w="28575">
-            <a:solidFill>
-              <a:srgbClr val="111111"/>
-            </a:solidFill>
-            <a:prstDash val="solid"/>
-            <a:round/>
-            <a:headEnd len="sm" w="sm" type="none"/>
-            <a:tailEnd len="sm" w="sm" type="none"/>
-          </a:ln>
-        </p:spPr>
-      </p:cxnSp>
+          <p:cNvSpPr/>
+          <p:nvPr/>
+        </p:nvSpPr>
+        <p:spPr>
+          <a:xfrm>
+            <a:off x="548640" y="6441377"/>
+            <a:ext cx="11094415" cy="28575"/>
+          </a:xfrm>
+          <a:prstGeom prst="rect">
+            <a:avLst/>
+          </a:prstGeom>
+          <a:solidFill>
+            <a:srgbClr val="111111"/>
+          </a:solidFill>
+          <a:ln>
+            <a:noFill/>
+          </a:ln>
+        </p:spPr>
+        <p:txBody>
+          <a:bodyPr/>
+          <a:lstStyle/>
+          <a:p/>
+        </p:txBody>
+      </p:sp>
       <p:sp>
         <p:nvSpPr>
           <p:cNvPr id="288" name="Google Shape;288;p8"/>
@@ -18900,58 +18940,60 @@
           </a:p>
         </p:txBody>
       </p:sp>
-      <p:cxnSp>
-        <p:nvCxnSpPr>
+      <p:sp>
+        <p:nvSpPr>
           <p:cNvPr id="294" name="Google Shape;294;p8"/>
-          <p:cNvCxnSpPr/>
-          <p:nvPr/>
-        </p:nvCxnSpPr>
-        <p:spPr>
-          <a:xfrm>
-            <a:off x="1060704" y="5532120"/>
-            <a:ext cx="1" cy="384048"/>
-          </a:xfrm>
-          <a:prstGeom prst="straightConnector1">
-            <a:avLst/>
-          </a:prstGeom>
-          <a:noFill/>
-          <a:ln cap="flat" cmpd="sng" w="25400">
-            <a:solidFill>
-              <a:srgbClr val="111111"/>
-            </a:solidFill>
-            <a:prstDash val="solid"/>
-            <a:round/>
-            <a:headEnd len="sm" w="sm" type="none"/>
-            <a:tailEnd len="sm" w="sm" type="none"/>
-          </a:ln>
-        </p:spPr>
-      </p:cxnSp>
-      <p:cxnSp>
-        <p:nvCxnSpPr>
+          <p:cNvSpPr/>
+          <p:nvPr/>
+        </p:nvSpPr>
+        <p:spPr>
+          <a:xfrm>
+            <a:off x="1048004" y="5532120"/>
+            <a:ext cx="25400" cy="384048"/>
+          </a:xfrm>
+          <a:prstGeom prst="rect">
+            <a:avLst/>
+          </a:prstGeom>
+          <a:solidFill>
+            <a:srgbClr val="111111"/>
+          </a:solidFill>
+          <a:ln>
+            <a:noFill/>
+          </a:ln>
+        </p:spPr>
+        <p:txBody>
+          <a:bodyPr/>
+          <a:lstStyle/>
+          <a:p/>
+        </p:txBody>
+      </p:sp>
+      <p:sp>
+        <p:nvSpPr>
           <p:cNvPr id="295" name="Google Shape;295;p8"/>
-          <p:cNvCxnSpPr/>
-          <p:nvPr/>
-        </p:nvCxnSpPr>
-        <p:spPr>
-          <a:xfrm>
-            <a:off x="1060704" y="5724144"/>
-            <a:ext cx="192024" cy="1"/>
-          </a:xfrm>
-          <a:prstGeom prst="straightConnector1">
-            <a:avLst/>
-          </a:prstGeom>
-          <a:noFill/>
-          <a:ln cap="flat" cmpd="sng" w="25400">
-            <a:solidFill>
-              <a:srgbClr val="111111"/>
-            </a:solidFill>
-            <a:prstDash val="solid"/>
-            <a:round/>
-            <a:headEnd len="sm" w="sm" type="none"/>
-            <a:tailEnd len="sm" w="sm" type="none"/>
-          </a:ln>
-        </p:spPr>
-      </p:cxnSp>
+          <p:cNvSpPr/>
+          <p:nvPr/>
+        </p:nvSpPr>
+        <p:spPr>
+          <a:xfrm>
+            <a:off x="1060704" y="5711444"/>
+            <a:ext cx="192024" cy="25400"/>
+          </a:xfrm>
+          <a:prstGeom prst="rect">
+            <a:avLst/>
+          </a:prstGeom>
+          <a:solidFill>
+            <a:srgbClr val="111111"/>
+          </a:solidFill>
+          <a:ln>
+            <a:noFill/>
+          </a:ln>
+        </p:spPr>
+        <p:txBody>
+          <a:bodyPr/>
+          <a:lstStyle/>
+          <a:p/>
+        </p:txBody>
+      </p:sp>
       <p:pic>
         <p:nvPicPr>
           <p:cNvPr id="296" name="Picture 295" descr="causal-graph.png"/>
@@ -19055,58 +19097,60 @@
           </a:p>
         </p:txBody>
       </p:sp>
-      <p:cxnSp>
-        <p:nvCxnSpPr>
+      <p:sp>
+        <p:nvSpPr>
           <p:cNvPr id="304" name="Google Shape;304;p9"/>
-          <p:cNvCxnSpPr/>
-          <p:nvPr/>
-        </p:nvCxnSpPr>
-        <p:spPr>
-          <a:xfrm>
-            <a:off x="694944" y="274320"/>
-            <a:ext cx="1" cy="292608"/>
-          </a:xfrm>
-          <a:prstGeom prst="straightConnector1">
-            <a:avLst/>
-          </a:prstGeom>
-          <a:noFill/>
-          <a:ln cap="flat" cmpd="sng" w="25400">
-            <a:solidFill>
-              <a:srgbClr val="111111"/>
-            </a:solidFill>
-            <a:prstDash val="solid"/>
-            <a:round/>
-            <a:headEnd len="sm" w="sm" type="none"/>
-            <a:tailEnd len="sm" w="sm" type="none"/>
-          </a:ln>
-        </p:spPr>
-      </p:cxnSp>
-      <p:cxnSp>
-        <p:nvCxnSpPr>
+          <p:cNvSpPr/>
+          <p:nvPr/>
+        </p:nvSpPr>
+        <p:spPr>
+          <a:xfrm>
+            <a:off x="682244" y="274320"/>
+            <a:ext cx="25400" cy="292608"/>
+          </a:xfrm>
+          <a:prstGeom prst="rect">
+            <a:avLst/>
+          </a:prstGeom>
+          <a:solidFill>
+            <a:srgbClr val="111111"/>
+          </a:solidFill>
+          <a:ln>
+            <a:noFill/>
+          </a:ln>
+        </p:spPr>
+        <p:txBody>
+          <a:bodyPr/>
+          <a:lstStyle/>
+          <a:p/>
+        </p:txBody>
+      </p:sp>
+      <p:sp>
+        <p:nvSpPr>
           <p:cNvPr id="305" name="Google Shape;305;p9"/>
-          <p:cNvCxnSpPr/>
-          <p:nvPr/>
-        </p:nvCxnSpPr>
-        <p:spPr>
-          <a:xfrm>
-            <a:off x="694944" y="420624"/>
-            <a:ext cx="146304" cy="1"/>
-          </a:xfrm>
-          <a:prstGeom prst="straightConnector1">
-            <a:avLst/>
-          </a:prstGeom>
-          <a:noFill/>
-          <a:ln cap="flat" cmpd="sng" w="25400">
-            <a:solidFill>
-              <a:srgbClr val="111111"/>
-            </a:solidFill>
-            <a:prstDash val="solid"/>
-            <a:round/>
-            <a:headEnd len="sm" w="sm" type="none"/>
-            <a:tailEnd len="sm" w="sm" type="none"/>
-          </a:ln>
-        </p:spPr>
-      </p:cxnSp>
+          <p:cNvSpPr/>
+          <p:nvPr/>
+        </p:nvSpPr>
+        <p:spPr>
+          <a:xfrm>
+            <a:off x="694944" y="407924"/>
+            <a:ext cx="146304" cy="25400"/>
+          </a:xfrm>
+          <a:prstGeom prst="rect">
+            <a:avLst/>
+          </a:prstGeom>
+          <a:solidFill>
+            <a:srgbClr val="111111"/>
+          </a:solidFill>
+          <a:ln>
+            <a:noFill/>
+          </a:ln>
+        </p:spPr>
+        <p:txBody>
+          <a:bodyPr/>
+          <a:lstStyle/>
+          <a:p/>
+        </p:txBody>
+      </p:sp>
       <p:sp>
         <p:nvSpPr>
           <p:cNvPr id="306" name="Google Shape;306;p9"/>
@@ -19287,32 +19331,33 @@
           </a:p>
         </p:txBody>
       </p:sp>
-      <p:cxnSp>
-        <p:nvCxnSpPr>
+      <p:sp>
+        <p:nvSpPr>
           <p:cNvPr id="309" name="Google Shape;309;p9"/>
-          <p:cNvCxnSpPr/>
-          <p:nvPr/>
-        </p:nvCxnSpPr>
-        <p:spPr>
-          <a:xfrm>
-            <a:off x="548640" y="6455664"/>
-            <a:ext cx="11094415" cy="1"/>
-          </a:xfrm>
-          <a:prstGeom prst="straightConnector1">
-            <a:avLst/>
-          </a:prstGeom>
-          <a:noFill/>
-          <a:ln cap="flat" cmpd="sng" w="28575">
-            <a:solidFill>
-              <a:srgbClr val="111111"/>
-            </a:solidFill>
-            <a:prstDash val="solid"/>
-            <a:round/>
-            <a:headEnd len="sm" w="sm" type="none"/>
-            <a:tailEnd len="sm" w="sm" type="none"/>
-          </a:ln>
-        </p:spPr>
-      </p:cxnSp>
+          <p:cNvSpPr/>
+          <p:nvPr/>
+        </p:nvSpPr>
+        <p:spPr>
+          <a:xfrm>
+            <a:off x="548640" y="6441377"/>
+            <a:ext cx="11094415" cy="28575"/>
+          </a:xfrm>
+          <a:prstGeom prst="rect">
+            <a:avLst/>
+          </a:prstGeom>
+          <a:solidFill>
+            <a:srgbClr val="111111"/>
+          </a:solidFill>
+          <a:ln>
+            <a:noFill/>
+          </a:ln>
+        </p:spPr>
+        <p:txBody>
+          <a:bodyPr/>
+          <a:lstStyle/>
+          <a:p/>
+        </p:txBody>
+      </p:sp>
       <p:sp>
         <p:nvSpPr>
           <p:cNvPr id="310" name="Google Shape;310;p9"/>
@@ -19742,7 +19787,7 @@
         </p:nvGraphicFramePr>
         <p:xfrm>
           <a:off x="548640" y="2596896"/>
-          <a:ext cx="3000000" cy="2048275"/>
+          <a:ext cx="3000000" cy="3000000"/>
         </p:xfrm>
         <a:graphic>
           <a:graphicData uri="http://schemas.openxmlformats.org/drawingml/2006/table">
@@ -20841,58 +20886,60 @@
           </a:p>
         </p:txBody>
       </p:sp>
-      <p:cxnSp>
-        <p:nvCxnSpPr>
+      <p:sp>
+        <p:nvSpPr>
           <p:cNvPr id="320" name="Google Shape;320;p9"/>
-          <p:cNvCxnSpPr/>
-          <p:nvPr/>
-        </p:nvCxnSpPr>
-        <p:spPr>
-          <a:xfrm>
-            <a:off x="11155680" y="5870448"/>
-            <a:ext cx="1" cy="365760"/>
-          </a:xfrm>
-          <a:prstGeom prst="straightConnector1">
-            <a:avLst/>
-          </a:prstGeom>
-          <a:noFill/>
-          <a:ln cap="flat" cmpd="sng" w="25400">
-            <a:solidFill>
-              <a:srgbClr val="111111"/>
-            </a:solidFill>
-            <a:prstDash val="solid"/>
-            <a:round/>
-            <a:headEnd len="sm" w="sm" type="none"/>
-            <a:tailEnd len="sm" w="sm" type="none"/>
-          </a:ln>
-        </p:spPr>
-      </p:cxnSp>
-      <p:cxnSp>
-        <p:nvCxnSpPr>
+          <p:cNvSpPr/>
+          <p:nvPr/>
+        </p:nvSpPr>
+        <p:spPr>
+          <a:xfrm>
+            <a:off x="11142980" y="5870448"/>
+            <a:ext cx="25400" cy="365760"/>
+          </a:xfrm>
+          <a:prstGeom prst="rect">
+            <a:avLst/>
+          </a:prstGeom>
+          <a:solidFill>
+            <a:srgbClr val="111111"/>
+          </a:solidFill>
+          <a:ln>
+            <a:noFill/>
+          </a:ln>
+        </p:spPr>
+        <p:txBody>
+          <a:bodyPr/>
+          <a:lstStyle/>
+          <a:p/>
+        </p:txBody>
+      </p:sp>
+      <p:sp>
+        <p:nvSpPr>
           <p:cNvPr id="321" name="Google Shape;321;p9"/>
-          <p:cNvCxnSpPr/>
-          <p:nvPr/>
-        </p:nvCxnSpPr>
-        <p:spPr>
-          <a:xfrm>
-            <a:off x="11155680" y="6053328"/>
-            <a:ext cx="182880" cy="1"/>
-          </a:xfrm>
-          <a:prstGeom prst="straightConnector1">
-            <a:avLst/>
-          </a:prstGeom>
-          <a:noFill/>
-          <a:ln cap="flat" cmpd="sng" w="25400">
-            <a:solidFill>
-              <a:srgbClr val="111111"/>
-            </a:solidFill>
-            <a:prstDash val="solid"/>
-            <a:round/>
-            <a:headEnd len="sm" w="sm" type="none"/>
-            <a:tailEnd len="sm" w="sm" type="none"/>
-          </a:ln>
-        </p:spPr>
-      </p:cxnSp>
+          <p:cNvSpPr/>
+          <p:nvPr/>
+        </p:nvSpPr>
+        <p:spPr>
+          <a:xfrm>
+            <a:off x="11155680" y="6040628"/>
+            <a:ext cx="182880" cy="25400"/>
+          </a:xfrm>
+          <a:prstGeom prst="rect">
+            <a:avLst/>
+          </a:prstGeom>
+          <a:solidFill>
+            <a:srgbClr val="111111"/>
+          </a:solidFill>
+          <a:ln>
+            <a:noFill/>
+          </a:ln>
+        </p:spPr>
+        <p:txBody>
+          <a:bodyPr/>
+          <a:lstStyle/>
+          <a:p/>
+        </p:txBody>
+      </p:sp>
     </p:spTree>
   </p:cSld>
   <p:clrMapOvr>
